--- a/slides/day 3/D3C2_Transformers.pptx
+++ b/slides/day 3/D3C2_Transformers.pptx
@@ -5,7 +5,7 @@
     <p:sldMasterId id="2147483648" r:id="rId1"/>
   </p:sldMasterIdLst>
   <p:notesMasterIdLst>
-    <p:notesMasterId r:id="rId24"/>
+    <p:notesMasterId r:id="rId25"/>
   </p:notesMasterIdLst>
   <p:sldIdLst>
     <p:sldId id="256" r:id="rId2"/>
@@ -28,8 +28,9 @@
     <p:sldId id="305" r:id="rId19"/>
     <p:sldId id="325" r:id="rId20"/>
     <p:sldId id="285" r:id="rId21"/>
-    <p:sldId id="321" r:id="rId22"/>
-    <p:sldId id="322" r:id="rId23"/>
+    <p:sldId id="327" r:id="rId22"/>
+    <p:sldId id="321" r:id="rId23"/>
+    <p:sldId id="322" r:id="rId24"/>
   </p:sldIdLst>
   <p:sldSz cx="12192000" cy="6858000"/>
   <p:notesSz cx="6858000" cy="9144000"/>
@@ -1196,7 +1197,7 @@
           <a:p>
             <a:fld id="{FF5685EE-3D40-0A4E-BB88-46887330FC0A}" type="datetimeFigureOut">
               <a:rPr lang="en-US" smtClean="0"/>
-              <a:t>10/8/2025</a:t>
+              <a:t>2/18/26</a:t>
             </a:fld>
             <a:endParaRPr lang="en-US"/>
           </a:p>
@@ -1508,7 +1509,7 @@
           <a:bodyPr/>
           <a:lstStyle/>
           <a:p>
-            <a:endParaRPr lang="en-US" dirty="0"/>
+            <a:endParaRPr lang="en-US"/>
           </a:p>
         </p:txBody>
       </p:sp>
@@ -1529,7 +1530,7 @@
           <a:p>
             <a:fld id="{30752F2A-FA59-1746-ABA5-28C394E5ED08}" type="slidenum">
               <a:rPr lang="en-US" smtClean="0"/>
-              <a:t>7</a:t>
+              <a:t>1</a:t>
             </a:fld>
             <a:endParaRPr lang="en-US"/>
           </a:p>
@@ -1538,7 +1539,854 @@
     </p:spTree>
     <p:extLst>
       <p:ext uri="{BB962C8B-B14F-4D97-AF65-F5344CB8AC3E}">
-        <p14:creationId xmlns:p14="http://schemas.microsoft.com/office/powerpoint/2010/main" val="87269396"/>
+        <p14:creationId xmlns:p14="http://schemas.microsoft.com/office/powerpoint/2010/main" val="870178702"/>
+      </p:ext>
+    </p:extLst>
+  </p:cSld>
+  <p:clrMapOvr>
+    <a:masterClrMapping/>
+  </p:clrMapOvr>
+</p:notes>
+</file>
+
+<file path=ppt/notesSlides/notesSlide10.xml><?xml version="1.0" encoding="utf-8"?>
+<p:notes xmlns:a="http://schemas.openxmlformats.org/drawingml/2006/main" xmlns:r="http://schemas.openxmlformats.org/officeDocument/2006/relationships" xmlns:p="http://schemas.openxmlformats.org/presentationml/2006/main">
+  <p:cSld>
+    <p:spTree>
+      <p:nvGrpSpPr>
+        <p:cNvPr id="1" name=""/>
+        <p:cNvGrpSpPr/>
+        <p:nvPr/>
+      </p:nvGrpSpPr>
+      <p:grpSpPr>
+        <a:xfrm>
+          <a:off x="0" y="0"/>
+          <a:ext cx="0" cy="0"/>
+          <a:chOff x="0" y="0"/>
+          <a:chExt cx="0" cy="0"/>
+        </a:xfrm>
+      </p:grpSpPr>
+      <p:sp>
+        <p:nvSpPr>
+          <p:cNvPr id="2" name="Slide Image Placeholder 1"/>
+          <p:cNvSpPr>
+            <a:spLocks noGrp="1" noRot="1" noChangeAspect="1"/>
+          </p:cNvSpPr>
+          <p:nvPr>
+            <p:ph type="sldImg"/>
+          </p:nvPr>
+        </p:nvSpPr>
+        <p:spPr/>
+      </p:sp>
+      <p:sp>
+        <p:nvSpPr>
+          <p:cNvPr id="3" name="Notes Placeholder 2"/>
+          <p:cNvSpPr>
+            <a:spLocks noGrp="1"/>
+          </p:cNvSpPr>
+          <p:nvPr>
+            <p:ph type="body" idx="1"/>
+          </p:nvPr>
+        </p:nvSpPr>
+        <p:spPr/>
+        <p:txBody>
+          <a:bodyPr/>
+          <a:lstStyle/>
+          <a:p>
+            <a:endParaRPr lang="en-US"/>
+          </a:p>
+        </p:txBody>
+      </p:sp>
+      <p:sp>
+        <p:nvSpPr>
+          <p:cNvPr id="4" name="Slide Number Placeholder 3"/>
+          <p:cNvSpPr>
+            <a:spLocks noGrp="1"/>
+          </p:cNvSpPr>
+          <p:nvPr>
+            <p:ph type="sldNum" sz="quarter" idx="5"/>
+          </p:nvPr>
+        </p:nvSpPr>
+        <p:spPr/>
+        <p:txBody>
+          <a:bodyPr/>
+          <a:lstStyle/>
+          <a:p>
+            <a:fld id="{30752F2A-FA59-1746-ABA5-28C394E5ED08}" type="slidenum">
+              <a:rPr lang="en-US" smtClean="0"/>
+              <a:t>10</a:t>
+            </a:fld>
+            <a:endParaRPr lang="en-US"/>
+          </a:p>
+        </p:txBody>
+      </p:sp>
+    </p:spTree>
+    <p:extLst>
+      <p:ext uri="{BB962C8B-B14F-4D97-AF65-F5344CB8AC3E}">
+        <p14:creationId xmlns:p14="http://schemas.microsoft.com/office/powerpoint/2010/main" val="27423330"/>
+      </p:ext>
+    </p:extLst>
+  </p:cSld>
+  <p:clrMapOvr>
+    <a:masterClrMapping/>
+  </p:clrMapOvr>
+</p:notes>
+</file>
+
+<file path=ppt/notesSlides/notesSlide11.xml><?xml version="1.0" encoding="utf-8"?>
+<p:notes xmlns:a="http://schemas.openxmlformats.org/drawingml/2006/main" xmlns:r="http://schemas.openxmlformats.org/officeDocument/2006/relationships" xmlns:p="http://schemas.openxmlformats.org/presentationml/2006/main">
+  <p:cSld>
+    <p:spTree>
+      <p:nvGrpSpPr>
+        <p:cNvPr id="1" name=""/>
+        <p:cNvGrpSpPr/>
+        <p:nvPr/>
+      </p:nvGrpSpPr>
+      <p:grpSpPr>
+        <a:xfrm>
+          <a:off x="0" y="0"/>
+          <a:ext cx="0" cy="0"/>
+          <a:chOff x="0" y="0"/>
+          <a:chExt cx="0" cy="0"/>
+        </a:xfrm>
+      </p:grpSpPr>
+      <p:sp>
+        <p:nvSpPr>
+          <p:cNvPr id="2" name="Slide Image Placeholder 1"/>
+          <p:cNvSpPr>
+            <a:spLocks noGrp="1" noRot="1" noChangeAspect="1"/>
+          </p:cNvSpPr>
+          <p:nvPr>
+            <p:ph type="sldImg"/>
+          </p:nvPr>
+        </p:nvSpPr>
+        <p:spPr/>
+      </p:sp>
+      <p:sp>
+        <p:nvSpPr>
+          <p:cNvPr id="3" name="Notes Placeholder 2"/>
+          <p:cNvSpPr>
+            <a:spLocks noGrp="1"/>
+          </p:cNvSpPr>
+          <p:nvPr>
+            <p:ph type="body" idx="1"/>
+          </p:nvPr>
+        </p:nvSpPr>
+        <p:spPr/>
+        <p:txBody>
+          <a:bodyPr/>
+          <a:lstStyle/>
+          <a:p>
+            <a:endParaRPr lang="en-US"/>
+          </a:p>
+        </p:txBody>
+      </p:sp>
+      <p:sp>
+        <p:nvSpPr>
+          <p:cNvPr id="4" name="Slide Number Placeholder 3"/>
+          <p:cNvSpPr>
+            <a:spLocks noGrp="1"/>
+          </p:cNvSpPr>
+          <p:nvPr>
+            <p:ph type="sldNum" sz="quarter" idx="5"/>
+          </p:nvPr>
+        </p:nvSpPr>
+        <p:spPr/>
+        <p:txBody>
+          <a:bodyPr/>
+          <a:lstStyle/>
+          <a:p>
+            <a:fld id="{30752F2A-FA59-1746-ABA5-28C394E5ED08}" type="slidenum">
+              <a:rPr lang="en-US" smtClean="0"/>
+              <a:t>11</a:t>
+            </a:fld>
+            <a:endParaRPr lang="en-US"/>
+          </a:p>
+        </p:txBody>
+      </p:sp>
+    </p:spTree>
+    <p:extLst>
+      <p:ext uri="{BB962C8B-B14F-4D97-AF65-F5344CB8AC3E}">
+        <p14:creationId xmlns:p14="http://schemas.microsoft.com/office/powerpoint/2010/main" val="1758174455"/>
+      </p:ext>
+    </p:extLst>
+  </p:cSld>
+  <p:clrMapOvr>
+    <a:masterClrMapping/>
+  </p:clrMapOvr>
+</p:notes>
+</file>
+
+<file path=ppt/notesSlides/notesSlide12.xml><?xml version="1.0" encoding="utf-8"?>
+<p:notes xmlns:a="http://schemas.openxmlformats.org/drawingml/2006/main" xmlns:r="http://schemas.openxmlformats.org/officeDocument/2006/relationships" xmlns:p="http://schemas.openxmlformats.org/presentationml/2006/main">
+  <p:cSld>
+    <p:spTree>
+      <p:nvGrpSpPr>
+        <p:cNvPr id="1" name=""/>
+        <p:cNvGrpSpPr/>
+        <p:nvPr/>
+      </p:nvGrpSpPr>
+      <p:grpSpPr>
+        <a:xfrm>
+          <a:off x="0" y="0"/>
+          <a:ext cx="0" cy="0"/>
+          <a:chOff x="0" y="0"/>
+          <a:chExt cx="0" cy="0"/>
+        </a:xfrm>
+      </p:grpSpPr>
+      <p:sp>
+        <p:nvSpPr>
+          <p:cNvPr id="2" name="Slide Image Placeholder 1"/>
+          <p:cNvSpPr>
+            <a:spLocks noGrp="1" noRot="1" noChangeAspect="1"/>
+          </p:cNvSpPr>
+          <p:nvPr>
+            <p:ph type="sldImg"/>
+          </p:nvPr>
+        </p:nvSpPr>
+        <p:spPr/>
+      </p:sp>
+      <p:sp>
+        <p:nvSpPr>
+          <p:cNvPr id="3" name="Notes Placeholder 2"/>
+          <p:cNvSpPr>
+            <a:spLocks noGrp="1"/>
+          </p:cNvSpPr>
+          <p:nvPr>
+            <p:ph type="body" idx="1"/>
+          </p:nvPr>
+        </p:nvSpPr>
+        <p:spPr/>
+        <p:txBody>
+          <a:bodyPr/>
+          <a:lstStyle/>
+          <a:p>
+            <a:endParaRPr lang="en-US"/>
+          </a:p>
+        </p:txBody>
+      </p:sp>
+      <p:sp>
+        <p:nvSpPr>
+          <p:cNvPr id="4" name="Slide Number Placeholder 3"/>
+          <p:cNvSpPr>
+            <a:spLocks noGrp="1"/>
+          </p:cNvSpPr>
+          <p:nvPr>
+            <p:ph type="sldNum" sz="quarter" idx="5"/>
+          </p:nvPr>
+        </p:nvSpPr>
+        <p:spPr/>
+        <p:txBody>
+          <a:bodyPr/>
+          <a:lstStyle/>
+          <a:p>
+            <a:fld id="{30752F2A-FA59-1746-ABA5-28C394E5ED08}" type="slidenum">
+              <a:rPr lang="en-US" smtClean="0"/>
+              <a:t>12</a:t>
+            </a:fld>
+            <a:endParaRPr lang="en-US"/>
+          </a:p>
+        </p:txBody>
+      </p:sp>
+    </p:spTree>
+    <p:extLst>
+      <p:ext uri="{BB962C8B-B14F-4D97-AF65-F5344CB8AC3E}">
+        <p14:creationId xmlns:p14="http://schemas.microsoft.com/office/powerpoint/2010/main" val="1492824058"/>
+      </p:ext>
+    </p:extLst>
+  </p:cSld>
+  <p:clrMapOvr>
+    <a:masterClrMapping/>
+  </p:clrMapOvr>
+</p:notes>
+</file>
+
+<file path=ppt/notesSlides/notesSlide13.xml><?xml version="1.0" encoding="utf-8"?>
+<p:notes xmlns:a="http://schemas.openxmlformats.org/drawingml/2006/main" xmlns:r="http://schemas.openxmlformats.org/officeDocument/2006/relationships" xmlns:p="http://schemas.openxmlformats.org/presentationml/2006/main">
+  <p:cSld>
+    <p:spTree>
+      <p:nvGrpSpPr>
+        <p:cNvPr id="1" name=""/>
+        <p:cNvGrpSpPr/>
+        <p:nvPr/>
+      </p:nvGrpSpPr>
+      <p:grpSpPr>
+        <a:xfrm>
+          <a:off x="0" y="0"/>
+          <a:ext cx="0" cy="0"/>
+          <a:chOff x="0" y="0"/>
+          <a:chExt cx="0" cy="0"/>
+        </a:xfrm>
+      </p:grpSpPr>
+      <p:sp>
+        <p:nvSpPr>
+          <p:cNvPr id="2" name="Slide Image Placeholder 1"/>
+          <p:cNvSpPr>
+            <a:spLocks noGrp="1" noRot="1" noChangeAspect="1"/>
+          </p:cNvSpPr>
+          <p:nvPr>
+            <p:ph type="sldImg"/>
+          </p:nvPr>
+        </p:nvSpPr>
+        <p:spPr/>
+      </p:sp>
+      <p:sp>
+        <p:nvSpPr>
+          <p:cNvPr id="3" name="Notes Placeholder 2"/>
+          <p:cNvSpPr>
+            <a:spLocks noGrp="1"/>
+          </p:cNvSpPr>
+          <p:nvPr>
+            <p:ph type="body" idx="1"/>
+          </p:nvPr>
+        </p:nvSpPr>
+        <p:spPr/>
+        <p:txBody>
+          <a:bodyPr/>
+          <a:lstStyle/>
+          <a:p>
+            <a:endParaRPr lang="en-US"/>
+          </a:p>
+        </p:txBody>
+      </p:sp>
+      <p:sp>
+        <p:nvSpPr>
+          <p:cNvPr id="4" name="Slide Number Placeholder 3"/>
+          <p:cNvSpPr>
+            <a:spLocks noGrp="1"/>
+          </p:cNvSpPr>
+          <p:nvPr>
+            <p:ph type="sldNum" sz="quarter" idx="5"/>
+          </p:nvPr>
+        </p:nvSpPr>
+        <p:spPr/>
+        <p:txBody>
+          <a:bodyPr/>
+          <a:lstStyle/>
+          <a:p>
+            <a:fld id="{30752F2A-FA59-1746-ABA5-28C394E5ED08}" type="slidenum">
+              <a:rPr lang="en-US" smtClean="0"/>
+              <a:t>13</a:t>
+            </a:fld>
+            <a:endParaRPr lang="en-US"/>
+          </a:p>
+        </p:txBody>
+      </p:sp>
+    </p:spTree>
+    <p:extLst>
+      <p:ext uri="{BB962C8B-B14F-4D97-AF65-F5344CB8AC3E}">
+        <p14:creationId xmlns:p14="http://schemas.microsoft.com/office/powerpoint/2010/main" val="2753823621"/>
+      </p:ext>
+    </p:extLst>
+  </p:cSld>
+  <p:clrMapOvr>
+    <a:masterClrMapping/>
+  </p:clrMapOvr>
+</p:notes>
+</file>
+
+<file path=ppt/notesSlides/notesSlide14.xml><?xml version="1.0" encoding="utf-8"?>
+<p:notes xmlns:a="http://schemas.openxmlformats.org/drawingml/2006/main" xmlns:r="http://schemas.openxmlformats.org/officeDocument/2006/relationships" xmlns:p="http://schemas.openxmlformats.org/presentationml/2006/main">
+  <p:cSld>
+    <p:spTree>
+      <p:nvGrpSpPr>
+        <p:cNvPr id="1" name=""/>
+        <p:cNvGrpSpPr/>
+        <p:nvPr/>
+      </p:nvGrpSpPr>
+      <p:grpSpPr>
+        <a:xfrm>
+          <a:off x="0" y="0"/>
+          <a:ext cx="0" cy="0"/>
+          <a:chOff x="0" y="0"/>
+          <a:chExt cx="0" cy="0"/>
+        </a:xfrm>
+      </p:grpSpPr>
+      <p:sp>
+        <p:nvSpPr>
+          <p:cNvPr id="2" name="Slide Image Placeholder 1"/>
+          <p:cNvSpPr>
+            <a:spLocks noGrp="1" noRot="1" noChangeAspect="1"/>
+          </p:cNvSpPr>
+          <p:nvPr>
+            <p:ph type="sldImg"/>
+          </p:nvPr>
+        </p:nvSpPr>
+        <p:spPr/>
+        <p:txBody>
+          <a:bodyPr/>
+          <a:lstStyle/>
+          <a:p>
+            <a:endParaRPr/>
+          </a:p>
+        </p:txBody>
+      </p:sp>
+      <p:sp>
+        <p:nvSpPr>
+          <p:cNvPr id="3" name="Notes Placeholder 2"/>
+          <p:cNvSpPr>
+            <a:spLocks noGrp="1"/>
+          </p:cNvSpPr>
+          <p:nvPr>
+            <p:ph type="body" idx="1"/>
+          </p:nvPr>
+        </p:nvSpPr>
+        <p:spPr/>
+        <p:txBody>
+          <a:bodyPr/>
+          <a:lstStyle/>
+          <a:p>
+            <a:endParaRPr lang="en-US" dirty="0"/>
+          </a:p>
+        </p:txBody>
+      </p:sp>
+      <p:sp>
+        <p:nvSpPr>
+          <p:cNvPr id="4" name="Slide Number Placeholder 3"/>
+          <p:cNvSpPr>
+            <a:spLocks noGrp="1"/>
+          </p:cNvSpPr>
+          <p:nvPr>
+            <p:ph type="sldNum" sz="quarter" idx="10"/>
+          </p:nvPr>
+        </p:nvSpPr>
+        <p:spPr/>
+        <p:txBody>
+          <a:bodyPr/>
+          <a:lstStyle/>
+          <a:p>
+            <a:fld id="{F7021451-1387-4CA6-816F-3879F97B5CBC}" type="slidenum">
+              <a:rPr lang="en-US"/>
+              <a:t>14</a:t>
+            </a:fld>
+            <a:endParaRPr lang="en-US"/>
+          </a:p>
+        </p:txBody>
+      </p:sp>
+    </p:spTree>
+    <p:extLst>
+      <p:ext uri="{BB962C8B-B14F-4D97-AF65-F5344CB8AC3E}">
+        <p14:creationId xmlns:p14="http://schemas.microsoft.com/office/powerpoint/2010/main" val="1024086991"/>
+      </p:ext>
+    </p:extLst>
+  </p:cSld>
+  <p:clrMapOvr>
+    <a:masterClrMapping/>
+  </p:clrMapOvr>
+</p:notes>
+</file>
+
+<file path=ppt/notesSlides/notesSlide15.xml><?xml version="1.0" encoding="utf-8"?>
+<p:notes xmlns:a="http://schemas.openxmlformats.org/drawingml/2006/main" xmlns:r="http://schemas.openxmlformats.org/officeDocument/2006/relationships" xmlns:p="http://schemas.openxmlformats.org/presentationml/2006/main">
+  <p:cSld>
+    <p:spTree>
+      <p:nvGrpSpPr>
+        <p:cNvPr id="1" name=""/>
+        <p:cNvGrpSpPr/>
+        <p:nvPr/>
+      </p:nvGrpSpPr>
+      <p:grpSpPr>
+        <a:xfrm>
+          <a:off x="0" y="0"/>
+          <a:ext cx="0" cy="0"/>
+          <a:chOff x="0" y="0"/>
+          <a:chExt cx="0" cy="0"/>
+        </a:xfrm>
+      </p:grpSpPr>
+      <p:sp>
+        <p:nvSpPr>
+          <p:cNvPr id="2" name="Slide Image Placeholder 1"/>
+          <p:cNvSpPr>
+            <a:spLocks noGrp="1" noRot="1" noChangeAspect="1"/>
+          </p:cNvSpPr>
+          <p:nvPr>
+            <p:ph type="sldImg"/>
+          </p:nvPr>
+        </p:nvSpPr>
+        <p:spPr/>
+      </p:sp>
+      <p:sp>
+        <p:nvSpPr>
+          <p:cNvPr id="3" name="Notes Placeholder 2"/>
+          <p:cNvSpPr>
+            <a:spLocks noGrp="1"/>
+          </p:cNvSpPr>
+          <p:nvPr>
+            <p:ph type="body" idx="1"/>
+          </p:nvPr>
+        </p:nvSpPr>
+        <p:spPr/>
+        <p:txBody>
+          <a:bodyPr/>
+          <a:lstStyle/>
+          <a:p>
+            <a:endParaRPr lang="en-US"/>
+          </a:p>
+        </p:txBody>
+      </p:sp>
+      <p:sp>
+        <p:nvSpPr>
+          <p:cNvPr id="4" name="Slide Number Placeholder 3"/>
+          <p:cNvSpPr>
+            <a:spLocks noGrp="1"/>
+          </p:cNvSpPr>
+          <p:nvPr>
+            <p:ph type="sldNum" sz="quarter" idx="5"/>
+          </p:nvPr>
+        </p:nvSpPr>
+        <p:spPr/>
+        <p:txBody>
+          <a:bodyPr/>
+          <a:lstStyle/>
+          <a:p>
+            <a:fld id="{30752F2A-FA59-1746-ABA5-28C394E5ED08}" type="slidenum">
+              <a:rPr lang="en-US" smtClean="0"/>
+              <a:t>15</a:t>
+            </a:fld>
+            <a:endParaRPr lang="en-US"/>
+          </a:p>
+        </p:txBody>
+      </p:sp>
+    </p:spTree>
+    <p:extLst>
+      <p:ext uri="{BB962C8B-B14F-4D97-AF65-F5344CB8AC3E}">
+        <p14:creationId xmlns:p14="http://schemas.microsoft.com/office/powerpoint/2010/main" val="907370786"/>
+      </p:ext>
+    </p:extLst>
+  </p:cSld>
+  <p:clrMapOvr>
+    <a:masterClrMapping/>
+  </p:clrMapOvr>
+</p:notes>
+</file>
+
+<file path=ppt/notesSlides/notesSlide16.xml><?xml version="1.0" encoding="utf-8"?>
+<p:notes xmlns:a="http://schemas.openxmlformats.org/drawingml/2006/main" xmlns:r="http://schemas.openxmlformats.org/officeDocument/2006/relationships" xmlns:p="http://schemas.openxmlformats.org/presentationml/2006/main">
+  <p:cSld>
+    <p:spTree>
+      <p:nvGrpSpPr>
+        <p:cNvPr id="1" name=""/>
+        <p:cNvGrpSpPr/>
+        <p:nvPr/>
+      </p:nvGrpSpPr>
+      <p:grpSpPr>
+        <a:xfrm>
+          <a:off x="0" y="0"/>
+          <a:ext cx="0" cy="0"/>
+          <a:chOff x="0" y="0"/>
+          <a:chExt cx="0" cy="0"/>
+        </a:xfrm>
+      </p:grpSpPr>
+      <p:sp>
+        <p:nvSpPr>
+          <p:cNvPr id="2" name="Slide Image Placeholder 1"/>
+          <p:cNvSpPr>
+            <a:spLocks noGrp="1" noRot="1" noChangeAspect="1"/>
+          </p:cNvSpPr>
+          <p:nvPr>
+            <p:ph type="sldImg"/>
+          </p:nvPr>
+        </p:nvSpPr>
+        <p:spPr/>
+      </p:sp>
+      <p:sp>
+        <p:nvSpPr>
+          <p:cNvPr id="3" name="Notes Placeholder 2"/>
+          <p:cNvSpPr>
+            <a:spLocks noGrp="1"/>
+          </p:cNvSpPr>
+          <p:nvPr>
+            <p:ph type="body" idx="1"/>
+          </p:nvPr>
+        </p:nvSpPr>
+        <p:spPr/>
+        <p:txBody>
+          <a:bodyPr/>
+          <a:lstStyle/>
+          <a:p>
+            <a:endParaRPr lang="en-US"/>
+          </a:p>
+        </p:txBody>
+      </p:sp>
+      <p:sp>
+        <p:nvSpPr>
+          <p:cNvPr id="4" name="Slide Number Placeholder 3"/>
+          <p:cNvSpPr>
+            <a:spLocks noGrp="1"/>
+          </p:cNvSpPr>
+          <p:nvPr>
+            <p:ph type="sldNum" sz="quarter" idx="5"/>
+          </p:nvPr>
+        </p:nvSpPr>
+        <p:spPr/>
+        <p:txBody>
+          <a:bodyPr/>
+          <a:lstStyle/>
+          <a:p>
+            <a:fld id="{30752F2A-FA59-1746-ABA5-28C394E5ED08}" type="slidenum">
+              <a:rPr lang="en-US" smtClean="0"/>
+              <a:t>16</a:t>
+            </a:fld>
+            <a:endParaRPr lang="en-US"/>
+          </a:p>
+        </p:txBody>
+      </p:sp>
+    </p:spTree>
+    <p:extLst>
+      <p:ext uri="{BB962C8B-B14F-4D97-AF65-F5344CB8AC3E}">
+        <p14:creationId xmlns:p14="http://schemas.microsoft.com/office/powerpoint/2010/main" val="3985793489"/>
+      </p:ext>
+    </p:extLst>
+  </p:cSld>
+  <p:clrMapOvr>
+    <a:masterClrMapping/>
+  </p:clrMapOvr>
+</p:notes>
+</file>
+
+<file path=ppt/notesSlides/notesSlide17.xml><?xml version="1.0" encoding="utf-8"?>
+<p:notes xmlns:a="http://schemas.openxmlformats.org/drawingml/2006/main" xmlns:r="http://schemas.openxmlformats.org/officeDocument/2006/relationships" xmlns:p="http://schemas.openxmlformats.org/presentationml/2006/main">
+  <p:cSld>
+    <p:spTree>
+      <p:nvGrpSpPr>
+        <p:cNvPr id="1" name=""/>
+        <p:cNvGrpSpPr/>
+        <p:nvPr/>
+      </p:nvGrpSpPr>
+      <p:grpSpPr>
+        <a:xfrm>
+          <a:off x="0" y="0"/>
+          <a:ext cx="0" cy="0"/>
+          <a:chOff x="0" y="0"/>
+          <a:chExt cx="0" cy="0"/>
+        </a:xfrm>
+      </p:grpSpPr>
+      <p:sp>
+        <p:nvSpPr>
+          <p:cNvPr id="2" name="Slide Image Placeholder 1"/>
+          <p:cNvSpPr>
+            <a:spLocks noGrp="1" noRot="1" noChangeAspect="1"/>
+          </p:cNvSpPr>
+          <p:nvPr>
+            <p:ph type="sldImg"/>
+          </p:nvPr>
+        </p:nvSpPr>
+        <p:spPr/>
+      </p:sp>
+      <p:sp>
+        <p:nvSpPr>
+          <p:cNvPr id="3" name="Notes Placeholder 2"/>
+          <p:cNvSpPr>
+            <a:spLocks noGrp="1"/>
+          </p:cNvSpPr>
+          <p:nvPr>
+            <p:ph type="body" idx="1"/>
+          </p:nvPr>
+        </p:nvSpPr>
+        <p:spPr/>
+        <p:txBody>
+          <a:bodyPr/>
+          <a:lstStyle/>
+          <a:p>
+            <a:endParaRPr lang="en-US"/>
+          </a:p>
+        </p:txBody>
+      </p:sp>
+      <p:sp>
+        <p:nvSpPr>
+          <p:cNvPr id="4" name="Slide Number Placeholder 3"/>
+          <p:cNvSpPr>
+            <a:spLocks noGrp="1"/>
+          </p:cNvSpPr>
+          <p:nvPr>
+            <p:ph type="sldNum" sz="quarter" idx="5"/>
+          </p:nvPr>
+        </p:nvSpPr>
+        <p:spPr/>
+        <p:txBody>
+          <a:bodyPr/>
+          <a:lstStyle/>
+          <a:p>
+            <a:fld id="{30752F2A-FA59-1746-ABA5-28C394E5ED08}" type="slidenum">
+              <a:rPr lang="en-US" smtClean="0"/>
+              <a:t>17</a:t>
+            </a:fld>
+            <a:endParaRPr lang="en-US"/>
+          </a:p>
+        </p:txBody>
+      </p:sp>
+    </p:spTree>
+    <p:extLst>
+      <p:ext uri="{BB962C8B-B14F-4D97-AF65-F5344CB8AC3E}">
+        <p14:creationId xmlns:p14="http://schemas.microsoft.com/office/powerpoint/2010/main" val="2812915620"/>
+      </p:ext>
+    </p:extLst>
+  </p:cSld>
+  <p:clrMapOvr>
+    <a:masterClrMapping/>
+  </p:clrMapOvr>
+</p:notes>
+</file>
+
+<file path=ppt/notesSlides/notesSlide18.xml><?xml version="1.0" encoding="utf-8"?>
+<p:notes xmlns:a="http://schemas.openxmlformats.org/drawingml/2006/main" xmlns:r="http://schemas.openxmlformats.org/officeDocument/2006/relationships" xmlns:p="http://schemas.openxmlformats.org/presentationml/2006/main">
+  <p:cSld>
+    <p:spTree>
+      <p:nvGrpSpPr>
+        <p:cNvPr id="1" name=""/>
+        <p:cNvGrpSpPr/>
+        <p:nvPr/>
+      </p:nvGrpSpPr>
+      <p:grpSpPr>
+        <a:xfrm>
+          <a:off x="0" y="0"/>
+          <a:ext cx="0" cy="0"/>
+          <a:chOff x="0" y="0"/>
+          <a:chExt cx="0" cy="0"/>
+        </a:xfrm>
+      </p:grpSpPr>
+      <p:sp>
+        <p:nvSpPr>
+          <p:cNvPr id="2" name="Slide Image Placeholder 1"/>
+          <p:cNvSpPr>
+            <a:spLocks noGrp="1" noRot="1" noChangeAspect="1"/>
+          </p:cNvSpPr>
+          <p:nvPr>
+            <p:ph type="sldImg"/>
+          </p:nvPr>
+        </p:nvSpPr>
+        <p:spPr/>
+      </p:sp>
+      <p:sp>
+        <p:nvSpPr>
+          <p:cNvPr id="3" name="Notes Placeholder 2"/>
+          <p:cNvSpPr>
+            <a:spLocks noGrp="1"/>
+          </p:cNvSpPr>
+          <p:nvPr>
+            <p:ph type="body" idx="1"/>
+          </p:nvPr>
+        </p:nvSpPr>
+        <p:spPr/>
+        <p:txBody>
+          <a:bodyPr/>
+          <a:lstStyle/>
+          <a:p>
+            <a:endParaRPr lang="en-US"/>
+          </a:p>
+        </p:txBody>
+      </p:sp>
+      <p:sp>
+        <p:nvSpPr>
+          <p:cNvPr id="4" name="Slide Number Placeholder 3"/>
+          <p:cNvSpPr>
+            <a:spLocks noGrp="1"/>
+          </p:cNvSpPr>
+          <p:nvPr>
+            <p:ph type="sldNum" sz="quarter" idx="5"/>
+          </p:nvPr>
+        </p:nvSpPr>
+        <p:spPr/>
+        <p:txBody>
+          <a:bodyPr/>
+          <a:lstStyle/>
+          <a:p>
+            <a:fld id="{30752F2A-FA59-1746-ABA5-28C394E5ED08}" type="slidenum">
+              <a:rPr lang="en-US" smtClean="0"/>
+              <a:t>18</a:t>
+            </a:fld>
+            <a:endParaRPr lang="en-US"/>
+          </a:p>
+        </p:txBody>
+      </p:sp>
+    </p:spTree>
+    <p:extLst>
+      <p:ext uri="{BB962C8B-B14F-4D97-AF65-F5344CB8AC3E}">
+        <p14:creationId xmlns:p14="http://schemas.microsoft.com/office/powerpoint/2010/main" val="4010982894"/>
+      </p:ext>
+    </p:extLst>
+  </p:cSld>
+  <p:clrMapOvr>
+    <a:masterClrMapping/>
+  </p:clrMapOvr>
+</p:notes>
+</file>
+
+<file path=ppt/notesSlides/notesSlide19.xml><?xml version="1.0" encoding="utf-8"?>
+<p:notes xmlns:a="http://schemas.openxmlformats.org/drawingml/2006/main" xmlns:r="http://schemas.openxmlformats.org/officeDocument/2006/relationships" xmlns:p="http://schemas.openxmlformats.org/presentationml/2006/main">
+  <p:cSld>
+    <p:spTree>
+      <p:nvGrpSpPr>
+        <p:cNvPr id="1" name=""/>
+        <p:cNvGrpSpPr/>
+        <p:nvPr/>
+      </p:nvGrpSpPr>
+      <p:grpSpPr>
+        <a:xfrm>
+          <a:off x="0" y="0"/>
+          <a:ext cx="0" cy="0"/>
+          <a:chOff x="0" y="0"/>
+          <a:chExt cx="0" cy="0"/>
+        </a:xfrm>
+      </p:grpSpPr>
+      <p:sp>
+        <p:nvSpPr>
+          <p:cNvPr id="2" name="Slide Image Placeholder 1"/>
+          <p:cNvSpPr>
+            <a:spLocks noGrp="1" noRot="1" noChangeAspect="1"/>
+          </p:cNvSpPr>
+          <p:nvPr>
+            <p:ph type="sldImg"/>
+          </p:nvPr>
+        </p:nvSpPr>
+        <p:spPr/>
+      </p:sp>
+      <p:sp>
+        <p:nvSpPr>
+          <p:cNvPr id="3" name="Notes Placeholder 2"/>
+          <p:cNvSpPr>
+            <a:spLocks noGrp="1"/>
+          </p:cNvSpPr>
+          <p:nvPr>
+            <p:ph type="body" idx="1"/>
+          </p:nvPr>
+        </p:nvSpPr>
+        <p:spPr/>
+        <p:txBody>
+          <a:bodyPr/>
+          <a:lstStyle/>
+          <a:p>
+            <a:endParaRPr lang="en-US"/>
+          </a:p>
+        </p:txBody>
+      </p:sp>
+      <p:sp>
+        <p:nvSpPr>
+          <p:cNvPr id="4" name="Slide Number Placeholder 3"/>
+          <p:cNvSpPr>
+            <a:spLocks noGrp="1"/>
+          </p:cNvSpPr>
+          <p:nvPr>
+            <p:ph type="sldNum" sz="quarter" idx="5"/>
+          </p:nvPr>
+        </p:nvSpPr>
+        <p:spPr/>
+        <p:txBody>
+          <a:bodyPr/>
+          <a:lstStyle/>
+          <a:p>
+            <a:fld id="{30752F2A-FA59-1746-ABA5-28C394E5ED08}" type="slidenum">
+              <a:rPr lang="en-US" smtClean="0"/>
+              <a:t>19</a:t>
+            </a:fld>
+            <a:endParaRPr lang="en-US"/>
+          </a:p>
+        </p:txBody>
+      </p:sp>
+    </p:spTree>
+    <p:extLst>
+      <p:ext uri="{BB962C8B-B14F-4D97-AF65-F5344CB8AC3E}">
+        <p14:creationId xmlns:p14="http://schemas.microsoft.com/office/powerpoint/2010/main" val="675226198"/>
       </p:ext>
     </p:extLst>
   </p:cSld>
@@ -1576,22 +2424,34 @@
           </p:nvPr>
         </p:nvSpPr>
         <p:spPr/>
+      </p:sp>
+      <p:sp>
+        <p:nvSpPr>
+          <p:cNvPr id="3" name="Notes Placeholder 2"/>
+          <p:cNvSpPr>
+            <a:spLocks noGrp="1"/>
+          </p:cNvSpPr>
+          <p:nvPr>
+            <p:ph type="body" idx="1"/>
+          </p:nvPr>
+        </p:nvSpPr>
+        <p:spPr/>
         <p:txBody>
           <a:bodyPr/>
           <a:lstStyle/>
           <a:p>
-            <a:endParaRPr/>
-          </a:p>
-        </p:txBody>
-      </p:sp>
-      <p:sp>
-        <p:nvSpPr>
-          <p:cNvPr id="3" name="Notes Placeholder 2"/>
-          <p:cNvSpPr>
-            <a:spLocks noGrp="1"/>
-          </p:cNvSpPr>
-          <p:nvPr>
-            <p:ph type="body" idx="1"/>
+            <a:endParaRPr lang="en-US"/>
+          </a:p>
+        </p:txBody>
+      </p:sp>
+      <p:sp>
+        <p:nvSpPr>
+          <p:cNvPr id="4" name="Slide Number Placeholder 3"/>
+          <p:cNvSpPr>
+            <a:spLocks noGrp="1"/>
+          </p:cNvSpPr>
+          <p:nvPr>
+            <p:ph type="sldNum" sz="quarter" idx="5"/>
           </p:nvPr>
         </p:nvSpPr>
         <p:spPr/>
@@ -1599,28 +2459,9 @@
           <a:bodyPr/>
           <a:lstStyle/>
           <a:p>
-            <a:endParaRPr lang="en-US" dirty="0"/>
-          </a:p>
-        </p:txBody>
-      </p:sp>
-      <p:sp>
-        <p:nvSpPr>
-          <p:cNvPr id="4" name="Slide Number Placeholder 3"/>
-          <p:cNvSpPr>
-            <a:spLocks noGrp="1"/>
-          </p:cNvSpPr>
-          <p:nvPr>
-            <p:ph type="sldNum" sz="quarter" idx="10"/>
-          </p:nvPr>
-        </p:nvSpPr>
-        <p:spPr/>
-        <p:txBody>
-          <a:bodyPr/>
-          <a:lstStyle/>
-          <a:p>
-            <a:fld id="{F7021451-1387-4CA6-816F-3879F97B5CBC}" type="slidenum">
-              <a:rPr lang="en-US"/>
-              <a:t>14</a:t>
+            <a:fld id="{30752F2A-FA59-1746-ABA5-28C394E5ED08}" type="slidenum">
+              <a:rPr lang="en-US" smtClean="0"/>
+              <a:t>2</a:t>
             </a:fld>
             <a:endParaRPr lang="en-US"/>
           </a:p>
@@ -1629,7 +2470,942 @@
     </p:spTree>
     <p:extLst>
       <p:ext uri="{BB962C8B-B14F-4D97-AF65-F5344CB8AC3E}">
-        <p14:creationId xmlns:p14="http://schemas.microsoft.com/office/powerpoint/2010/main" val="1024086991"/>
+        <p14:creationId xmlns:p14="http://schemas.microsoft.com/office/powerpoint/2010/main" val="3572451186"/>
+      </p:ext>
+    </p:extLst>
+  </p:cSld>
+  <p:clrMapOvr>
+    <a:masterClrMapping/>
+  </p:clrMapOvr>
+</p:notes>
+</file>
+
+<file path=ppt/notesSlides/notesSlide20.xml><?xml version="1.0" encoding="utf-8"?>
+<p:notes xmlns:a="http://schemas.openxmlformats.org/drawingml/2006/main" xmlns:r="http://schemas.openxmlformats.org/officeDocument/2006/relationships" xmlns:p="http://schemas.openxmlformats.org/presentationml/2006/main">
+  <p:cSld>
+    <p:spTree>
+      <p:nvGrpSpPr>
+        <p:cNvPr id="1" name=""/>
+        <p:cNvGrpSpPr/>
+        <p:nvPr/>
+      </p:nvGrpSpPr>
+      <p:grpSpPr>
+        <a:xfrm>
+          <a:off x="0" y="0"/>
+          <a:ext cx="0" cy="0"/>
+          <a:chOff x="0" y="0"/>
+          <a:chExt cx="0" cy="0"/>
+        </a:xfrm>
+      </p:grpSpPr>
+      <p:sp>
+        <p:nvSpPr>
+          <p:cNvPr id="2" name="Slide Image Placeholder 1"/>
+          <p:cNvSpPr>
+            <a:spLocks noGrp="1" noRot="1" noChangeAspect="1"/>
+          </p:cNvSpPr>
+          <p:nvPr>
+            <p:ph type="sldImg"/>
+          </p:nvPr>
+        </p:nvSpPr>
+        <p:spPr/>
+      </p:sp>
+      <p:sp>
+        <p:nvSpPr>
+          <p:cNvPr id="3" name="Notes Placeholder 2"/>
+          <p:cNvSpPr>
+            <a:spLocks noGrp="1"/>
+          </p:cNvSpPr>
+          <p:nvPr>
+            <p:ph type="body" idx="1"/>
+          </p:nvPr>
+        </p:nvSpPr>
+        <p:spPr/>
+        <p:txBody>
+          <a:bodyPr/>
+          <a:lstStyle/>
+          <a:p>
+            <a:endParaRPr lang="en-US"/>
+          </a:p>
+        </p:txBody>
+      </p:sp>
+      <p:sp>
+        <p:nvSpPr>
+          <p:cNvPr id="4" name="Slide Number Placeholder 3"/>
+          <p:cNvSpPr>
+            <a:spLocks noGrp="1"/>
+          </p:cNvSpPr>
+          <p:nvPr>
+            <p:ph type="sldNum" sz="quarter" idx="5"/>
+          </p:nvPr>
+        </p:nvSpPr>
+        <p:spPr/>
+        <p:txBody>
+          <a:bodyPr/>
+          <a:lstStyle/>
+          <a:p>
+            <a:fld id="{30752F2A-FA59-1746-ABA5-28C394E5ED08}" type="slidenum">
+              <a:rPr lang="en-US" smtClean="0"/>
+              <a:t>20</a:t>
+            </a:fld>
+            <a:endParaRPr lang="en-US"/>
+          </a:p>
+        </p:txBody>
+      </p:sp>
+    </p:spTree>
+    <p:extLst>
+      <p:ext uri="{BB962C8B-B14F-4D97-AF65-F5344CB8AC3E}">
+        <p14:creationId xmlns:p14="http://schemas.microsoft.com/office/powerpoint/2010/main" val="2300242483"/>
+      </p:ext>
+    </p:extLst>
+  </p:cSld>
+  <p:clrMapOvr>
+    <a:masterClrMapping/>
+  </p:clrMapOvr>
+</p:notes>
+</file>
+
+<file path=ppt/notesSlides/notesSlide21.xml><?xml version="1.0" encoding="utf-8"?>
+<p:notes xmlns:a="http://schemas.openxmlformats.org/drawingml/2006/main" xmlns:r="http://schemas.openxmlformats.org/officeDocument/2006/relationships" xmlns:p="http://schemas.openxmlformats.org/presentationml/2006/main">
+  <p:cSld>
+    <p:spTree>
+      <p:nvGrpSpPr>
+        <p:cNvPr id="1" name=""/>
+        <p:cNvGrpSpPr/>
+        <p:nvPr/>
+      </p:nvGrpSpPr>
+      <p:grpSpPr>
+        <a:xfrm>
+          <a:off x="0" y="0"/>
+          <a:ext cx="0" cy="0"/>
+          <a:chOff x="0" y="0"/>
+          <a:chExt cx="0" cy="0"/>
+        </a:xfrm>
+      </p:grpSpPr>
+      <p:sp>
+        <p:nvSpPr>
+          <p:cNvPr id="2" name="Slide Image Placeholder 1"/>
+          <p:cNvSpPr>
+            <a:spLocks noGrp="1" noRot="1" noChangeAspect="1"/>
+          </p:cNvSpPr>
+          <p:nvPr>
+            <p:ph type="sldImg"/>
+          </p:nvPr>
+        </p:nvSpPr>
+        <p:spPr/>
+      </p:sp>
+      <p:sp>
+        <p:nvSpPr>
+          <p:cNvPr id="3" name="Notes Placeholder 2"/>
+          <p:cNvSpPr>
+            <a:spLocks noGrp="1"/>
+          </p:cNvSpPr>
+          <p:nvPr>
+            <p:ph type="body" idx="1"/>
+          </p:nvPr>
+        </p:nvSpPr>
+        <p:spPr/>
+        <p:txBody>
+          <a:bodyPr/>
+          <a:lstStyle/>
+          <a:p>
+            <a:r>
+              <a:rPr lang="en-US"/>
+              <a:t>Do not modify the notes in this section to avoid tampering with the Poll Everywhere activity.
+More info at polleverywhere.com/support
+What is a primary advantage of using Multi-Head Attention when forecasting complex systems like the weather?</a:t>
+            </a:r>
+          </a:p>
+          <a:p>
+            <a:r>
+              <a:rPr lang="en-US"/>
+              <a:t>https://www.polleverywhere.com/multiple_choice_polls/21taUBEO7nRKhZ37Z5yHt?state=opened&amp;flow=Default&amp;onscreen=persist</a:t>
+            </a:r>
+          </a:p>
+        </p:txBody>
+      </p:sp>
+      <p:sp>
+        <p:nvSpPr>
+          <p:cNvPr id="4" name="Slide Number Placeholder 3"/>
+          <p:cNvSpPr>
+            <a:spLocks noGrp="1"/>
+          </p:cNvSpPr>
+          <p:nvPr>
+            <p:ph type="sldNum" sz="quarter" idx="5"/>
+          </p:nvPr>
+        </p:nvSpPr>
+        <p:spPr/>
+        <p:txBody>
+          <a:bodyPr/>
+          <a:lstStyle/>
+          <a:p>
+            <a:fld id="{30752F2A-FA59-1746-ABA5-28C394E5ED08}" type="slidenum">
+              <a:rPr lang="en-US" smtClean="0"/>
+              <a:t>21</a:t>
+            </a:fld>
+            <a:endParaRPr lang="en-US"/>
+          </a:p>
+        </p:txBody>
+      </p:sp>
+    </p:spTree>
+    <p:extLst>
+      <p:ext uri="{BB962C8B-B14F-4D97-AF65-F5344CB8AC3E}">
+        <p14:creationId xmlns:p14="http://schemas.microsoft.com/office/powerpoint/2010/main" val="1428127060"/>
+      </p:ext>
+    </p:extLst>
+  </p:cSld>
+  <p:clrMapOvr>
+    <a:masterClrMapping/>
+  </p:clrMapOvr>
+</p:notes>
+</file>
+
+<file path=ppt/notesSlides/notesSlide22.xml><?xml version="1.0" encoding="utf-8"?>
+<p:notes xmlns:a="http://schemas.openxmlformats.org/drawingml/2006/main" xmlns:r="http://schemas.openxmlformats.org/officeDocument/2006/relationships" xmlns:p="http://schemas.openxmlformats.org/presentationml/2006/main">
+  <p:cSld>
+    <p:spTree>
+      <p:nvGrpSpPr>
+        <p:cNvPr id="1" name=""/>
+        <p:cNvGrpSpPr/>
+        <p:nvPr/>
+      </p:nvGrpSpPr>
+      <p:grpSpPr>
+        <a:xfrm>
+          <a:off x="0" y="0"/>
+          <a:ext cx="0" cy="0"/>
+          <a:chOff x="0" y="0"/>
+          <a:chExt cx="0" cy="0"/>
+        </a:xfrm>
+      </p:grpSpPr>
+      <p:sp>
+        <p:nvSpPr>
+          <p:cNvPr id="2" name="Slide Image Placeholder 1"/>
+          <p:cNvSpPr>
+            <a:spLocks noGrp="1" noRot="1" noChangeAspect="1"/>
+          </p:cNvSpPr>
+          <p:nvPr>
+            <p:ph type="sldImg"/>
+          </p:nvPr>
+        </p:nvSpPr>
+        <p:spPr/>
+      </p:sp>
+      <p:sp>
+        <p:nvSpPr>
+          <p:cNvPr id="3" name="Notes Placeholder 2"/>
+          <p:cNvSpPr>
+            <a:spLocks noGrp="1"/>
+          </p:cNvSpPr>
+          <p:nvPr>
+            <p:ph type="body" idx="1"/>
+          </p:nvPr>
+        </p:nvSpPr>
+        <p:spPr/>
+        <p:txBody>
+          <a:bodyPr/>
+          <a:lstStyle/>
+          <a:p>
+            <a:endParaRPr lang="en-US"/>
+          </a:p>
+        </p:txBody>
+      </p:sp>
+      <p:sp>
+        <p:nvSpPr>
+          <p:cNvPr id="4" name="Slide Number Placeholder 3"/>
+          <p:cNvSpPr>
+            <a:spLocks noGrp="1"/>
+          </p:cNvSpPr>
+          <p:nvPr>
+            <p:ph type="sldNum" sz="quarter" idx="5"/>
+          </p:nvPr>
+        </p:nvSpPr>
+        <p:spPr/>
+        <p:txBody>
+          <a:bodyPr/>
+          <a:lstStyle/>
+          <a:p>
+            <a:fld id="{30752F2A-FA59-1746-ABA5-28C394E5ED08}" type="slidenum">
+              <a:rPr lang="en-US" smtClean="0"/>
+              <a:t>22</a:t>
+            </a:fld>
+            <a:endParaRPr lang="en-US"/>
+          </a:p>
+        </p:txBody>
+      </p:sp>
+    </p:spTree>
+    <p:extLst>
+      <p:ext uri="{BB962C8B-B14F-4D97-AF65-F5344CB8AC3E}">
+        <p14:creationId xmlns:p14="http://schemas.microsoft.com/office/powerpoint/2010/main" val="2850700281"/>
+      </p:ext>
+    </p:extLst>
+  </p:cSld>
+  <p:clrMapOvr>
+    <a:masterClrMapping/>
+  </p:clrMapOvr>
+</p:notes>
+</file>
+
+<file path=ppt/notesSlides/notesSlide23.xml><?xml version="1.0" encoding="utf-8"?>
+<p:notes xmlns:a="http://schemas.openxmlformats.org/drawingml/2006/main" xmlns:r="http://schemas.openxmlformats.org/officeDocument/2006/relationships" xmlns:p="http://schemas.openxmlformats.org/presentationml/2006/main">
+  <p:cSld>
+    <p:spTree>
+      <p:nvGrpSpPr>
+        <p:cNvPr id="1" name=""/>
+        <p:cNvGrpSpPr/>
+        <p:nvPr/>
+      </p:nvGrpSpPr>
+      <p:grpSpPr>
+        <a:xfrm>
+          <a:off x="0" y="0"/>
+          <a:ext cx="0" cy="0"/>
+          <a:chOff x="0" y="0"/>
+          <a:chExt cx="0" cy="0"/>
+        </a:xfrm>
+      </p:grpSpPr>
+      <p:sp>
+        <p:nvSpPr>
+          <p:cNvPr id="2" name="Slide Image Placeholder 1"/>
+          <p:cNvSpPr>
+            <a:spLocks noGrp="1" noRot="1" noChangeAspect="1"/>
+          </p:cNvSpPr>
+          <p:nvPr>
+            <p:ph type="sldImg"/>
+          </p:nvPr>
+        </p:nvSpPr>
+        <p:spPr/>
+      </p:sp>
+      <p:sp>
+        <p:nvSpPr>
+          <p:cNvPr id="3" name="Notes Placeholder 2"/>
+          <p:cNvSpPr>
+            <a:spLocks noGrp="1"/>
+          </p:cNvSpPr>
+          <p:nvPr>
+            <p:ph type="body" idx="1"/>
+          </p:nvPr>
+        </p:nvSpPr>
+        <p:spPr/>
+        <p:txBody>
+          <a:bodyPr/>
+          <a:lstStyle/>
+          <a:p>
+            <a:endParaRPr lang="en-US"/>
+          </a:p>
+        </p:txBody>
+      </p:sp>
+      <p:sp>
+        <p:nvSpPr>
+          <p:cNvPr id="4" name="Slide Number Placeholder 3"/>
+          <p:cNvSpPr>
+            <a:spLocks noGrp="1"/>
+          </p:cNvSpPr>
+          <p:nvPr>
+            <p:ph type="sldNum" sz="quarter" idx="5"/>
+          </p:nvPr>
+        </p:nvSpPr>
+        <p:spPr/>
+        <p:txBody>
+          <a:bodyPr/>
+          <a:lstStyle/>
+          <a:p>
+            <a:fld id="{30752F2A-FA59-1746-ABA5-28C394E5ED08}" type="slidenum">
+              <a:rPr lang="en-US" smtClean="0"/>
+              <a:t>23</a:t>
+            </a:fld>
+            <a:endParaRPr lang="en-US"/>
+          </a:p>
+        </p:txBody>
+      </p:sp>
+    </p:spTree>
+    <p:extLst>
+      <p:ext uri="{BB962C8B-B14F-4D97-AF65-F5344CB8AC3E}">
+        <p14:creationId xmlns:p14="http://schemas.microsoft.com/office/powerpoint/2010/main" val="1529310600"/>
+      </p:ext>
+    </p:extLst>
+  </p:cSld>
+  <p:clrMapOvr>
+    <a:masterClrMapping/>
+  </p:clrMapOvr>
+</p:notes>
+</file>
+
+<file path=ppt/notesSlides/notesSlide3.xml><?xml version="1.0" encoding="utf-8"?>
+<p:notes xmlns:a="http://schemas.openxmlformats.org/drawingml/2006/main" xmlns:r="http://schemas.openxmlformats.org/officeDocument/2006/relationships" xmlns:p="http://schemas.openxmlformats.org/presentationml/2006/main">
+  <p:cSld>
+    <p:spTree>
+      <p:nvGrpSpPr>
+        <p:cNvPr id="1" name=""/>
+        <p:cNvGrpSpPr/>
+        <p:nvPr/>
+      </p:nvGrpSpPr>
+      <p:grpSpPr>
+        <a:xfrm>
+          <a:off x="0" y="0"/>
+          <a:ext cx="0" cy="0"/>
+          <a:chOff x="0" y="0"/>
+          <a:chExt cx="0" cy="0"/>
+        </a:xfrm>
+      </p:grpSpPr>
+      <p:sp>
+        <p:nvSpPr>
+          <p:cNvPr id="2" name="Slide Image Placeholder 1"/>
+          <p:cNvSpPr>
+            <a:spLocks noGrp="1" noRot="1" noChangeAspect="1"/>
+          </p:cNvSpPr>
+          <p:nvPr>
+            <p:ph type="sldImg"/>
+          </p:nvPr>
+        </p:nvSpPr>
+        <p:spPr/>
+      </p:sp>
+      <p:sp>
+        <p:nvSpPr>
+          <p:cNvPr id="3" name="Notes Placeholder 2"/>
+          <p:cNvSpPr>
+            <a:spLocks noGrp="1"/>
+          </p:cNvSpPr>
+          <p:nvPr>
+            <p:ph type="body" idx="1"/>
+          </p:nvPr>
+        </p:nvSpPr>
+        <p:spPr/>
+        <p:txBody>
+          <a:bodyPr/>
+          <a:lstStyle/>
+          <a:p>
+            <a:endParaRPr lang="en-US"/>
+          </a:p>
+        </p:txBody>
+      </p:sp>
+      <p:sp>
+        <p:nvSpPr>
+          <p:cNvPr id="4" name="Slide Number Placeholder 3"/>
+          <p:cNvSpPr>
+            <a:spLocks noGrp="1"/>
+          </p:cNvSpPr>
+          <p:nvPr>
+            <p:ph type="sldNum" sz="quarter" idx="5"/>
+          </p:nvPr>
+        </p:nvSpPr>
+        <p:spPr/>
+        <p:txBody>
+          <a:bodyPr/>
+          <a:lstStyle/>
+          <a:p>
+            <a:fld id="{30752F2A-FA59-1746-ABA5-28C394E5ED08}" type="slidenum">
+              <a:rPr lang="en-US" smtClean="0"/>
+              <a:t>3</a:t>
+            </a:fld>
+            <a:endParaRPr lang="en-US"/>
+          </a:p>
+        </p:txBody>
+      </p:sp>
+    </p:spTree>
+    <p:extLst>
+      <p:ext uri="{BB962C8B-B14F-4D97-AF65-F5344CB8AC3E}">
+        <p14:creationId xmlns:p14="http://schemas.microsoft.com/office/powerpoint/2010/main" val="245586076"/>
+      </p:ext>
+    </p:extLst>
+  </p:cSld>
+  <p:clrMapOvr>
+    <a:masterClrMapping/>
+  </p:clrMapOvr>
+</p:notes>
+</file>
+
+<file path=ppt/notesSlides/notesSlide4.xml><?xml version="1.0" encoding="utf-8"?>
+<p:notes xmlns:a="http://schemas.openxmlformats.org/drawingml/2006/main" xmlns:r="http://schemas.openxmlformats.org/officeDocument/2006/relationships" xmlns:p="http://schemas.openxmlformats.org/presentationml/2006/main">
+  <p:cSld>
+    <p:spTree>
+      <p:nvGrpSpPr>
+        <p:cNvPr id="1" name=""/>
+        <p:cNvGrpSpPr/>
+        <p:nvPr/>
+      </p:nvGrpSpPr>
+      <p:grpSpPr>
+        <a:xfrm>
+          <a:off x="0" y="0"/>
+          <a:ext cx="0" cy="0"/>
+          <a:chOff x="0" y="0"/>
+          <a:chExt cx="0" cy="0"/>
+        </a:xfrm>
+      </p:grpSpPr>
+      <p:sp>
+        <p:nvSpPr>
+          <p:cNvPr id="2" name="Slide Image Placeholder 1"/>
+          <p:cNvSpPr>
+            <a:spLocks noGrp="1" noRot="1" noChangeAspect="1"/>
+          </p:cNvSpPr>
+          <p:nvPr>
+            <p:ph type="sldImg"/>
+          </p:nvPr>
+        </p:nvSpPr>
+        <p:spPr/>
+      </p:sp>
+      <p:sp>
+        <p:nvSpPr>
+          <p:cNvPr id="3" name="Notes Placeholder 2"/>
+          <p:cNvSpPr>
+            <a:spLocks noGrp="1"/>
+          </p:cNvSpPr>
+          <p:nvPr>
+            <p:ph type="body" idx="1"/>
+          </p:nvPr>
+        </p:nvSpPr>
+        <p:spPr/>
+        <p:txBody>
+          <a:bodyPr/>
+          <a:lstStyle/>
+          <a:p>
+            <a:endParaRPr lang="en-US"/>
+          </a:p>
+        </p:txBody>
+      </p:sp>
+      <p:sp>
+        <p:nvSpPr>
+          <p:cNvPr id="4" name="Slide Number Placeholder 3"/>
+          <p:cNvSpPr>
+            <a:spLocks noGrp="1"/>
+          </p:cNvSpPr>
+          <p:nvPr>
+            <p:ph type="sldNum" sz="quarter" idx="5"/>
+          </p:nvPr>
+        </p:nvSpPr>
+        <p:spPr/>
+        <p:txBody>
+          <a:bodyPr/>
+          <a:lstStyle/>
+          <a:p>
+            <a:fld id="{30752F2A-FA59-1746-ABA5-28C394E5ED08}" type="slidenum">
+              <a:rPr lang="en-US" smtClean="0"/>
+              <a:t>4</a:t>
+            </a:fld>
+            <a:endParaRPr lang="en-US"/>
+          </a:p>
+        </p:txBody>
+      </p:sp>
+    </p:spTree>
+    <p:extLst>
+      <p:ext uri="{BB962C8B-B14F-4D97-AF65-F5344CB8AC3E}">
+        <p14:creationId xmlns:p14="http://schemas.microsoft.com/office/powerpoint/2010/main" val="1737102537"/>
+      </p:ext>
+    </p:extLst>
+  </p:cSld>
+  <p:clrMapOvr>
+    <a:masterClrMapping/>
+  </p:clrMapOvr>
+</p:notes>
+</file>
+
+<file path=ppt/notesSlides/notesSlide5.xml><?xml version="1.0" encoding="utf-8"?>
+<p:notes xmlns:a="http://schemas.openxmlformats.org/drawingml/2006/main" xmlns:r="http://schemas.openxmlformats.org/officeDocument/2006/relationships" xmlns:p="http://schemas.openxmlformats.org/presentationml/2006/main">
+  <p:cSld>
+    <p:spTree>
+      <p:nvGrpSpPr>
+        <p:cNvPr id="1" name=""/>
+        <p:cNvGrpSpPr/>
+        <p:nvPr/>
+      </p:nvGrpSpPr>
+      <p:grpSpPr>
+        <a:xfrm>
+          <a:off x="0" y="0"/>
+          <a:ext cx="0" cy="0"/>
+          <a:chOff x="0" y="0"/>
+          <a:chExt cx="0" cy="0"/>
+        </a:xfrm>
+      </p:grpSpPr>
+      <p:sp>
+        <p:nvSpPr>
+          <p:cNvPr id="2" name="Slide Image Placeholder 1"/>
+          <p:cNvSpPr>
+            <a:spLocks noGrp="1" noRot="1" noChangeAspect="1"/>
+          </p:cNvSpPr>
+          <p:nvPr>
+            <p:ph type="sldImg"/>
+          </p:nvPr>
+        </p:nvSpPr>
+        <p:spPr/>
+      </p:sp>
+      <p:sp>
+        <p:nvSpPr>
+          <p:cNvPr id="3" name="Notes Placeholder 2"/>
+          <p:cNvSpPr>
+            <a:spLocks noGrp="1"/>
+          </p:cNvSpPr>
+          <p:nvPr>
+            <p:ph type="body" idx="1"/>
+          </p:nvPr>
+        </p:nvSpPr>
+        <p:spPr/>
+        <p:txBody>
+          <a:bodyPr/>
+          <a:lstStyle/>
+          <a:p>
+            <a:endParaRPr lang="en-US"/>
+          </a:p>
+        </p:txBody>
+      </p:sp>
+      <p:sp>
+        <p:nvSpPr>
+          <p:cNvPr id="4" name="Slide Number Placeholder 3"/>
+          <p:cNvSpPr>
+            <a:spLocks noGrp="1"/>
+          </p:cNvSpPr>
+          <p:nvPr>
+            <p:ph type="sldNum" sz="quarter" idx="5"/>
+          </p:nvPr>
+        </p:nvSpPr>
+        <p:spPr/>
+        <p:txBody>
+          <a:bodyPr/>
+          <a:lstStyle/>
+          <a:p>
+            <a:fld id="{30752F2A-FA59-1746-ABA5-28C394E5ED08}" type="slidenum">
+              <a:rPr lang="en-US" smtClean="0"/>
+              <a:t>5</a:t>
+            </a:fld>
+            <a:endParaRPr lang="en-US"/>
+          </a:p>
+        </p:txBody>
+      </p:sp>
+    </p:spTree>
+    <p:extLst>
+      <p:ext uri="{BB962C8B-B14F-4D97-AF65-F5344CB8AC3E}">
+        <p14:creationId xmlns:p14="http://schemas.microsoft.com/office/powerpoint/2010/main" val="4246741637"/>
+      </p:ext>
+    </p:extLst>
+  </p:cSld>
+  <p:clrMapOvr>
+    <a:masterClrMapping/>
+  </p:clrMapOvr>
+</p:notes>
+</file>
+
+<file path=ppt/notesSlides/notesSlide6.xml><?xml version="1.0" encoding="utf-8"?>
+<p:notes xmlns:a="http://schemas.openxmlformats.org/drawingml/2006/main" xmlns:r="http://schemas.openxmlformats.org/officeDocument/2006/relationships" xmlns:p="http://schemas.openxmlformats.org/presentationml/2006/main">
+  <p:cSld>
+    <p:spTree>
+      <p:nvGrpSpPr>
+        <p:cNvPr id="1" name=""/>
+        <p:cNvGrpSpPr/>
+        <p:nvPr/>
+      </p:nvGrpSpPr>
+      <p:grpSpPr>
+        <a:xfrm>
+          <a:off x="0" y="0"/>
+          <a:ext cx="0" cy="0"/>
+          <a:chOff x="0" y="0"/>
+          <a:chExt cx="0" cy="0"/>
+        </a:xfrm>
+      </p:grpSpPr>
+      <p:sp>
+        <p:nvSpPr>
+          <p:cNvPr id="2" name="Slide Image Placeholder 1"/>
+          <p:cNvSpPr>
+            <a:spLocks noGrp="1" noRot="1" noChangeAspect="1"/>
+          </p:cNvSpPr>
+          <p:nvPr>
+            <p:ph type="sldImg"/>
+          </p:nvPr>
+        </p:nvSpPr>
+        <p:spPr/>
+      </p:sp>
+      <p:sp>
+        <p:nvSpPr>
+          <p:cNvPr id="3" name="Notes Placeholder 2"/>
+          <p:cNvSpPr>
+            <a:spLocks noGrp="1"/>
+          </p:cNvSpPr>
+          <p:nvPr>
+            <p:ph type="body" idx="1"/>
+          </p:nvPr>
+        </p:nvSpPr>
+        <p:spPr/>
+        <p:txBody>
+          <a:bodyPr/>
+          <a:lstStyle/>
+          <a:p>
+            <a:endParaRPr lang="en-US"/>
+          </a:p>
+        </p:txBody>
+      </p:sp>
+      <p:sp>
+        <p:nvSpPr>
+          <p:cNvPr id="4" name="Slide Number Placeholder 3"/>
+          <p:cNvSpPr>
+            <a:spLocks noGrp="1"/>
+          </p:cNvSpPr>
+          <p:nvPr>
+            <p:ph type="sldNum" sz="quarter" idx="5"/>
+          </p:nvPr>
+        </p:nvSpPr>
+        <p:spPr/>
+        <p:txBody>
+          <a:bodyPr/>
+          <a:lstStyle/>
+          <a:p>
+            <a:fld id="{30752F2A-FA59-1746-ABA5-28C394E5ED08}" type="slidenum">
+              <a:rPr lang="en-US" smtClean="0"/>
+              <a:t>6</a:t>
+            </a:fld>
+            <a:endParaRPr lang="en-US"/>
+          </a:p>
+        </p:txBody>
+      </p:sp>
+    </p:spTree>
+    <p:extLst>
+      <p:ext uri="{BB962C8B-B14F-4D97-AF65-F5344CB8AC3E}">
+        <p14:creationId xmlns:p14="http://schemas.microsoft.com/office/powerpoint/2010/main" val="3185010601"/>
+      </p:ext>
+    </p:extLst>
+  </p:cSld>
+  <p:clrMapOvr>
+    <a:masterClrMapping/>
+  </p:clrMapOvr>
+</p:notes>
+</file>
+
+<file path=ppt/notesSlides/notesSlide7.xml><?xml version="1.0" encoding="utf-8"?>
+<p:notes xmlns:a="http://schemas.openxmlformats.org/drawingml/2006/main" xmlns:r="http://schemas.openxmlformats.org/officeDocument/2006/relationships" xmlns:p="http://schemas.openxmlformats.org/presentationml/2006/main">
+  <p:cSld>
+    <p:spTree>
+      <p:nvGrpSpPr>
+        <p:cNvPr id="1" name=""/>
+        <p:cNvGrpSpPr/>
+        <p:nvPr/>
+      </p:nvGrpSpPr>
+      <p:grpSpPr>
+        <a:xfrm>
+          <a:off x="0" y="0"/>
+          <a:ext cx="0" cy="0"/>
+          <a:chOff x="0" y="0"/>
+          <a:chExt cx="0" cy="0"/>
+        </a:xfrm>
+      </p:grpSpPr>
+      <p:sp>
+        <p:nvSpPr>
+          <p:cNvPr id="2" name="Slide Image Placeholder 1"/>
+          <p:cNvSpPr>
+            <a:spLocks noGrp="1" noRot="1" noChangeAspect="1"/>
+          </p:cNvSpPr>
+          <p:nvPr>
+            <p:ph type="sldImg"/>
+          </p:nvPr>
+        </p:nvSpPr>
+        <p:spPr/>
+      </p:sp>
+      <p:sp>
+        <p:nvSpPr>
+          <p:cNvPr id="3" name="Notes Placeholder 2"/>
+          <p:cNvSpPr>
+            <a:spLocks noGrp="1"/>
+          </p:cNvSpPr>
+          <p:nvPr>
+            <p:ph type="body" idx="1"/>
+          </p:nvPr>
+        </p:nvSpPr>
+        <p:spPr/>
+        <p:txBody>
+          <a:bodyPr/>
+          <a:lstStyle/>
+          <a:p>
+            <a:endParaRPr lang="en-US" dirty="0"/>
+          </a:p>
+        </p:txBody>
+      </p:sp>
+      <p:sp>
+        <p:nvSpPr>
+          <p:cNvPr id="4" name="Slide Number Placeholder 3"/>
+          <p:cNvSpPr>
+            <a:spLocks noGrp="1"/>
+          </p:cNvSpPr>
+          <p:nvPr>
+            <p:ph type="sldNum" sz="quarter" idx="5"/>
+          </p:nvPr>
+        </p:nvSpPr>
+        <p:spPr/>
+        <p:txBody>
+          <a:bodyPr/>
+          <a:lstStyle/>
+          <a:p>
+            <a:fld id="{30752F2A-FA59-1746-ABA5-28C394E5ED08}" type="slidenum">
+              <a:rPr lang="en-US" smtClean="0"/>
+              <a:t>7</a:t>
+            </a:fld>
+            <a:endParaRPr lang="en-US"/>
+          </a:p>
+        </p:txBody>
+      </p:sp>
+    </p:spTree>
+    <p:extLst>
+      <p:ext uri="{BB962C8B-B14F-4D97-AF65-F5344CB8AC3E}">
+        <p14:creationId xmlns:p14="http://schemas.microsoft.com/office/powerpoint/2010/main" val="87269396"/>
+      </p:ext>
+    </p:extLst>
+  </p:cSld>
+  <p:clrMapOvr>
+    <a:masterClrMapping/>
+  </p:clrMapOvr>
+</p:notes>
+</file>
+
+<file path=ppt/notesSlides/notesSlide8.xml><?xml version="1.0" encoding="utf-8"?>
+<p:notes xmlns:a="http://schemas.openxmlformats.org/drawingml/2006/main" xmlns:r="http://schemas.openxmlformats.org/officeDocument/2006/relationships" xmlns:p="http://schemas.openxmlformats.org/presentationml/2006/main">
+  <p:cSld>
+    <p:spTree>
+      <p:nvGrpSpPr>
+        <p:cNvPr id="1" name=""/>
+        <p:cNvGrpSpPr/>
+        <p:nvPr/>
+      </p:nvGrpSpPr>
+      <p:grpSpPr>
+        <a:xfrm>
+          <a:off x="0" y="0"/>
+          <a:ext cx="0" cy="0"/>
+          <a:chOff x="0" y="0"/>
+          <a:chExt cx="0" cy="0"/>
+        </a:xfrm>
+      </p:grpSpPr>
+      <p:sp>
+        <p:nvSpPr>
+          <p:cNvPr id="2" name="Slide Image Placeholder 1"/>
+          <p:cNvSpPr>
+            <a:spLocks noGrp="1" noRot="1" noChangeAspect="1"/>
+          </p:cNvSpPr>
+          <p:nvPr>
+            <p:ph type="sldImg"/>
+          </p:nvPr>
+        </p:nvSpPr>
+        <p:spPr/>
+      </p:sp>
+      <p:sp>
+        <p:nvSpPr>
+          <p:cNvPr id="3" name="Notes Placeholder 2"/>
+          <p:cNvSpPr>
+            <a:spLocks noGrp="1"/>
+          </p:cNvSpPr>
+          <p:nvPr>
+            <p:ph type="body" idx="1"/>
+          </p:nvPr>
+        </p:nvSpPr>
+        <p:spPr/>
+        <p:txBody>
+          <a:bodyPr/>
+          <a:lstStyle/>
+          <a:p>
+            <a:endParaRPr lang="en-US"/>
+          </a:p>
+        </p:txBody>
+      </p:sp>
+      <p:sp>
+        <p:nvSpPr>
+          <p:cNvPr id="4" name="Slide Number Placeholder 3"/>
+          <p:cNvSpPr>
+            <a:spLocks noGrp="1"/>
+          </p:cNvSpPr>
+          <p:nvPr>
+            <p:ph type="sldNum" sz="quarter" idx="5"/>
+          </p:nvPr>
+        </p:nvSpPr>
+        <p:spPr/>
+        <p:txBody>
+          <a:bodyPr/>
+          <a:lstStyle/>
+          <a:p>
+            <a:fld id="{30752F2A-FA59-1746-ABA5-28C394E5ED08}" type="slidenum">
+              <a:rPr lang="en-US" smtClean="0"/>
+              <a:t>8</a:t>
+            </a:fld>
+            <a:endParaRPr lang="en-US"/>
+          </a:p>
+        </p:txBody>
+      </p:sp>
+    </p:spTree>
+    <p:extLst>
+      <p:ext uri="{BB962C8B-B14F-4D97-AF65-F5344CB8AC3E}">
+        <p14:creationId xmlns:p14="http://schemas.microsoft.com/office/powerpoint/2010/main" val="3726345462"/>
+      </p:ext>
+    </p:extLst>
+  </p:cSld>
+  <p:clrMapOvr>
+    <a:masterClrMapping/>
+  </p:clrMapOvr>
+</p:notes>
+</file>
+
+<file path=ppt/notesSlides/notesSlide9.xml><?xml version="1.0" encoding="utf-8"?>
+<p:notes xmlns:a="http://schemas.openxmlformats.org/drawingml/2006/main" xmlns:r="http://schemas.openxmlformats.org/officeDocument/2006/relationships" xmlns:p="http://schemas.openxmlformats.org/presentationml/2006/main">
+  <p:cSld>
+    <p:spTree>
+      <p:nvGrpSpPr>
+        <p:cNvPr id="1" name=""/>
+        <p:cNvGrpSpPr/>
+        <p:nvPr/>
+      </p:nvGrpSpPr>
+      <p:grpSpPr>
+        <a:xfrm>
+          <a:off x="0" y="0"/>
+          <a:ext cx="0" cy="0"/>
+          <a:chOff x="0" y="0"/>
+          <a:chExt cx="0" cy="0"/>
+        </a:xfrm>
+      </p:grpSpPr>
+      <p:sp>
+        <p:nvSpPr>
+          <p:cNvPr id="2" name="Slide Image Placeholder 1"/>
+          <p:cNvSpPr>
+            <a:spLocks noGrp="1" noRot="1" noChangeAspect="1"/>
+          </p:cNvSpPr>
+          <p:nvPr>
+            <p:ph type="sldImg"/>
+          </p:nvPr>
+        </p:nvSpPr>
+        <p:spPr/>
+      </p:sp>
+      <p:sp>
+        <p:nvSpPr>
+          <p:cNvPr id="3" name="Notes Placeholder 2"/>
+          <p:cNvSpPr>
+            <a:spLocks noGrp="1"/>
+          </p:cNvSpPr>
+          <p:nvPr>
+            <p:ph type="body" idx="1"/>
+          </p:nvPr>
+        </p:nvSpPr>
+        <p:spPr/>
+        <p:txBody>
+          <a:bodyPr/>
+          <a:lstStyle/>
+          <a:p>
+            <a:endParaRPr lang="en-US"/>
+          </a:p>
+        </p:txBody>
+      </p:sp>
+      <p:sp>
+        <p:nvSpPr>
+          <p:cNvPr id="4" name="Slide Number Placeholder 3"/>
+          <p:cNvSpPr>
+            <a:spLocks noGrp="1"/>
+          </p:cNvSpPr>
+          <p:nvPr>
+            <p:ph type="sldNum" sz="quarter" idx="5"/>
+          </p:nvPr>
+        </p:nvSpPr>
+        <p:spPr/>
+        <p:txBody>
+          <a:bodyPr/>
+          <a:lstStyle/>
+          <a:p>
+            <a:fld id="{30752F2A-FA59-1746-ABA5-28C394E5ED08}" type="slidenum">
+              <a:rPr lang="en-US" smtClean="0"/>
+              <a:t>9</a:t>
+            </a:fld>
+            <a:endParaRPr lang="en-US"/>
+          </a:p>
+        </p:txBody>
+      </p:sp>
+    </p:spTree>
+    <p:extLst>
+      <p:ext uri="{BB962C8B-B14F-4D97-AF65-F5344CB8AC3E}">
+        <p14:creationId xmlns:p14="http://schemas.microsoft.com/office/powerpoint/2010/main" val="717775648"/>
       </p:ext>
     </p:extLst>
   </p:cSld>
@@ -2497,6 +4273,199 @@
 </p:sldLayout>
 </file>
 
+<file path=ppt/slideLayouts/slideLayout14.xml><?xml version="1.0" encoding="utf-8"?>
+<p:sldLayout xmlns:a="http://schemas.openxmlformats.org/drawingml/2006/main" xmlns:r="http://schemas.openxmlformats.org/officeDocument/2006/relationships" xmlns:p="http://schemas.openxmlformats.org/presentationml/2006/main" type="title" preserve="1">
+  <p:cSld name="1_Title Slide">
+    <p:spTree>
+      <p:nvGrpSpPr>
+        <p:cNvPr id="1" name=""/>
+        <p:cNvGrpSpPr/>
+        <p:nvPr/>
+      </p:nvGrpSpPr>
+      <p:grpSpPr>
+        <a:xfrm>
+          <a:off x="0" y="0"/>
+          <a:ext cx="0" cy="0"/>
+          <a:chOff x="0" y="0"/>
+          <a:chExt cx="0" cy="0"/>
+        </a:xfrm>
+      </p:grpSpPr>
+      <p:sp>
+        <p:nvSpPr>
+          <p:cNvPr id="2" name="Title 1">
+            <a:extLst>
+              <a:ext uri="{FF2B5EF4-FFF2-40B4-BE49-F238E27FC236}">
+                <a16:creationId xmlns:a16="http://schemas.microsoft.com/office/drawing/2014/main" id="{CD4C84AC-4BE3-48C0-950F-0BAB0CAE1289}"/>
+              </a:ext>
+            </a:extLst>
+          </p:cNvPr>
+          <p:cNvSpPr>
+            <a:spLocks noGrp="1"/>
+          </p:cNvSpPr>
+          <p:nvPr>
+            <p:ph type="ctrTitle"/>
+          </p:nvPr>
+        </p:nvSpPr>
+        <p:spPr>
+          <a:xfrm>
+            <a:off x="1524000" y="1122363"/>
+            <a:ext cx="9144000" cy="2387600"/>
+          </a:xfrm>
+        </p:spPr>
+        <p:txBody>
+          <a:bodyPr anchor="b"/>
+          <a:lstStyle>
+            <a:lvl1pPr algn="ctr">
+              <a:defRPr sz="6000"/>
+            </a:lvl1pPr>
+          </a:lstStyle>
+          <a:p>
+            <a:r>
+              <a:rPr lang="en-GB"/>
+              <a:t>Click to edit Master title style</a:t>
+            </a:r>
+            <a:endParaRPr lang="en-US"/>
+          </a:p>
+        </p:txBody>
+      </p:sp>
+      <p:sp>
+        <p:nvSpPr>
+          <p:cNvPr id="3" name="Subtitle 2">
+            <a:extLst>
+              <a:ext uri="{FF2B5EF4-FFF2-40B4-BE49-F238E27FC236}">
+                <a16:creationId xmlns:a16="http://schemas.microsoft.com/office/drawing/2014/main" id="{DA851E5D-854D-14E8-B86B-F61974DC458F}"/>
+              </a:ext>
+            </a:extLst>
+          </p:cNvPr>
+          <p:cNvSpPr>
+            <a:spLocks noGrp="1"/>
+          </p:cNvSpPr>
+          <p:nvPr>
+            <p:ph type="subTitle" idx="1"/>
+          </p:nvPr>
+        </p:nvSpPr>
+        <p:spPr>
+          <a:xfrm>
+            <a:off x="1524000" y="3602038"/>
+            <a:ext cx="9144000" cy="1655762"/>
+          </a:xfrm>
+        </p:spPr>
+        <p:txBody>
+          <a:bodyPr/>
+          <a:lstStyle>
+            <a:lvl1pPr marL="0" indent="0" algn="ctr">
+              <a:buNone/>
+              <a:defRPr sz="2400"/>
+            </a:lvl1pPr>
+            <a:lvl2pPr marL="457200" indent="0" algn="ctr">
+              <a:buNone/>
+              <a:defRPr sz="2000"/>
+            </a:lvl2pPr>
+            <a:lvl3pPr marL="914400" indent="0" algn="ctr">
+              <a:buNone/>
+              <a:defRPr sz="1800"/>
+            </a:lvl3pPr>
+            <a:lvl4pPr marL="1371600" indent="0" algn="ctr">
+              <a:buNone/>
+              <a:defRPr sz="1600"/>
+            </a:lvl4pPr>
+            <a:lvl5pPr marL="1828800" indent="0" algn="ctr">
+              <a:buNone/>
+              <a:defRPr sz="1600"/>
+            </a:lvl5pPr>
+            <a:lvl6pPr marL="2286000" indent="0" algn="ctr">
+              <a:buNone/>
+              <a:defRPr sz="1600"/>
+            </a:lvl6pPr>
+            <a:lvl7pPr marL="2743200" indent="0" algn="ctr">
+              <a:buNone/>
+              <a:defRPr sz="1600"/>
+            </a:lvl7pPr>
+            <a:lvl8pPr marL="3200400" indent="0" algn="ctr">
+              <a:buNone/>
+              <a:defRPr sz="1600"/>
+            </a:lvl8pPr>
+            <a:lvl9pPr marL="3657600" indent="0" algn="ctr">
+              <a:buNone/>
+              <a:defRPr sz="1600"/>
+            </a:lvl9pPr>
+          </a:lstStyle>
+          <a:p>
+            <a:r>
+              <a:rPr lang="en-GB"/>
+              <a:t>Click to edit Master subtitle style</a:t>
+            </a:r>
+            <a:endParaRPr lang="en-US"/>
+          </a:p>
+        </p:txBody>
+      </p:sp>
+      <p:sp>
+        <p:nvSpPr>
+          <p:cNvPr id="4" name="Footer Placeholder 3">
+            <a:extLst>
+              <a:ext uri="{FF2B5EF4-FFF2-40B4-BE49-F238E27FC236}">
+                <a16:creationId xmlns:a16="http://schemas.microsoft.com/office/drawing/2014/main" id="{FFB1AE72-89F8-50E3-F227-DF68D84209D2}"/>
+              </a:ext>
+            </a:extLst>
+          </p:cNvPr>
+          <p:cNvSpPr>
+            <a:spLocks noGrp="1"/>
+          </p:cNvSpPr>
+          <p:nvPr>
+            <p:ph type="ftr" sz="quarter" idx="10"/>
+          </p:nvPr>
+        </p:nvSpPr>
+        <p:spPr/>
+        <p:txBody>
+          <a:bodyPr/>
+          <a:lstStyle/>
+          <a:p>
+            <a:endParaRPr lang="en-US" dirty="0"/>
+          </a:p>
+        </p:txBody>
+      </p:sp>
+      <p:sp>
+        <p:nvSpPr>
+          <p:cNvPr id="5" name="Slide Number Placeholder 4">
+            <a:extLst>
+              <a:ext uri="{FF2B5EF4-FFF2-40B4-BE49-F238E27FC236}">
+                <a16:creationId xmlns:a16="http://schemas.microsoft.com/office/drawing/2014/main" id="{98F5921A-75FB-E846-056C-91FFEEEB88D0}"/>
+              </a:ext>
+            </a:extLst>
+          </p:cNvPr>
+          <p:cNvSpPr>
+            <a:spLocks noGrp="1"/>
+          </p:cNvSpPr>
+          <p:nvPr>
+            <p:ph type="sldNum" sz="quarter" idx="11"/>
+          </p:nvPr>
+        </p:nvSpPr>
+        <p:spPr/>
+        <p:txBody>
+          <a:bodyPr/>
+          <a:lstStyle/>
+          <a:p>
+            <a:fld id="{5A064C77-022D-3743-A04E-645624933D1D}" type="slidenum">
+              <a:rPr lang="en-US" smtClean="0"/>
+              <a:t>‹#›</a:t>
+            </a:fld>
+            <a:endParaRPr lang="en-US"/>
+          </a:p>
+        </p:txBody>
+      </p:sp>
+    </p:spTree>
+    <p:extLst>
+      <p:ext uri="{BB962C8B-B14F-4D97-AF65-F5344CB8AC3E}">
+        <p14:creationId xmlns:p14="http://schemas.microsoft.com/office/powerpoint/2010/main" val="179545976"/>
+      </p:ext>
+    </p:extLst>
+  </p:cSld>
+  <p:clrMapOvr>
+    <a:masterClrMapping/>
+  </p:clrMapOvr>
+</p:sldLayout>
+</file>
+
 <file path=ppt/slideLayouts/slideLayout2.xml><?xml version="1.0" encoding="utf-8"?>
 <p:sldLayout xmlns:a="http://schemas.openxmlformats.org/drawingml/2006/main" xmlns:r="http://schemas.openxmlformats.org/officeDocument/2006/relationships" xmlns:p="http://schemas.openxmlformats.org/presentationml/2006/main" preserve="1" userDrawn="1">
   <p:cSld name="Title Slide">
@@ -3979,7 +5948,7 @@
     <p:bg>
       <p:bgPr>
         <a:blipFill dpi="0" rotWithShape="1">
-          <a:blip r:embed="rId15">
+          <a:blip r:embed="rId16">
             <a:lum/>
           </a:blip>
           <a:srcRect/>
@@ -4223,6 +6192,7 @@
     <p:sldLayoutId id="2147483665" r:id="rId11"/>
     <p:sldLayoutId id="2147483666" r:id="rId12"/>
     <p:sldLayoutId id="2147483667" r:id="rId13"/>
+    <p:sldLayoutId id="2147483668" r:id="rId14"/>
   </p:sldLayoutIdLst>
   <p:hf hdr="0" ftr="0" dt="0"/>
   <p:txStyles>
@@ -4642,19 +6612,19 @@
         </p:spPr>
         <p:txBody>
           <a:bodyPr>
-            <a:normAutofit/>
+            <a:normAutofit lnSpcReduction="10000"/>
           </a:bodyPr>
           <a:lstStyle/>
           <a:p>
             <a:r>
               <a:rPr lang="en-US" dirty="0"/>
-              <a:t>Goal: Given weather data from previous days (temperature, rainfall, humidity), predict the next day’s values.</a:t>
+              <a:t>Goal: Given weather data from previous days (temperature, rainfall, humidity), predict the next day’s values</a:t>
             </a:r>
           </a:p>
           <a:p>
             <a:r>
               <a:rPr lang="en-US" dirty="0"/>
-              <a:t>Sequence length (window) determines how far back we look.</a:t>
+              <a:t>Sequence length (window) determines how far back we look</a:t>
             </a:r>
           </a:p>
           <a:p>
@@ -4672,6 +6642,20 @@
             <a:r>
               <a:rPr lang="en-US" dirty="0"/>
               <a:t>folder</a:t>
+            </a:r>
+          </a:p>
+          <a:p>
+            <a:r>
+              <a:rPr lang="en-US" dirty="0"/>
+              <a:t>(Note: in real weather forecasts we use a </a:t>
+            </a:r>
+            <a:r>
+              <a:rPr lang="en-US" i="1" dirty="0"/>
+              <a:t>causal mask</a:t>
+            </a:r>
+            <a:r>
+              <a:rPr lang="en-US" dirty="0"/>
+              <a:t> to stop e.g. day 5 being able to help predict day 4)</a:t>
             </a:r>
           </a:p>
         </p:txBody>
@@ -4694,7 +6678,7 @@
         </p:xfrm>
         <a:graphic>
           <a:graphicData uri="http://schemas.openxmlformats.org/drawingml/2006/chart">
-            <c:chart xmlns:c="http://schemas.openxmlformats.org/drawingml/2006/chart" xmlns:r="http://schemas.openxmlformats.org/officeDocument/2006/relationships" r:id="rId2"/>
+            <c:chart xmlns:c="http://schemas.openxmlformats.org/drawingml/2006/chart" xmlns:r="http://schemas.openxmlformats.org/officeDocument/2006/relationships" r:id="rId3"/>
           </a:graphicData>
         </a:graphic>
       </p:graphicFrame>
@@ -4837,7 +6821,7 @@
             </a:r>
             <a:r>
               <a:rPr lang="en-US" dirty="0"/>
-              <a:t> as target.</a:t>
+              <a:t> as target</a:t>
             </a:r>
           </a:p>
           <a:p>
@@ -4849,13 +6833,13 @@
           <a:p>
             <a:r>
               <a:rPr lang="en-US" dirty="0"/>
-              <a:t>Transformer processes the entire window simultaneously.</a:t>
+              <a:t>Transformer processes the entire window simultaneously</a:t>
             </a:r>
           </a:p>
           <a:p>
             <a:r>
               <a:rPr lang="en-US" dirty="0"/>
-              <a:t>Think back to the steps we have just followed.</a:t>
+              <a:t>Think back to the steps we have just followed</a:t>
             </a:r>
           </a:p>
           <a:p>
@@ -5751,7 +7735,7 @@
           <a:p>
             <a:r>
               <a:rPr lang="en-US" dirty="0"/>
-              <a:t>This snippet computes a single attention layer using only NumPy.</a:t>
+              <a:t>This snippet computes a single attention layer using only NumPy</a:t>
             </a:r>
           </a:p>
           <a:p>
@@ -5763,15 +7747,12 @@
               <a:rPr lang="en-US" dirty="0" err="1"/>
               <a:t>autograd</a:t>
             </a:r>
+            <a:endParaRPr lang="en-US" dirty="0"/>
+          </a:p>
+          <a:p>
             <a:r>
               <a:rPr lang="en-US" dirty="0"/>
-              <a:t>.</a:t>
-            </a:r>
-          </a:p>
-          <a:p>
-            <a:r>
-              <a:rPr lang="en-US" dirty="0"/>
-              <a:t>(No biases here).</a:t>
+              <a:t>(No biases here)</a:t>
             </a:r>
           </a:p>
         </p:txBody>
@@ -7126,7 +9107,7 @@
             </a:r>
             <a:r>
               <a:rPr lang="en-US" dirty="0"/>
-              <a:t>: embedding dimension (e.g., 32–256) – controls representation capacity.</a:t>
+              <a:t>: embedding dimension (e.g., 32–256) – controls representation capacity</a:t>
             </a:r>
           </a:p>
           <a:p>
@@ -7139,7 +9120,7 @@
             </a:r>
             <a:r>
               <a:rPr lang="en-US" dirty="0"/>
-              <a:t>: number of features.</a:t>
+              <a:t>: number of features</a:t>
             </a:r>
           </a:p>
           <a:p>
@@ -7152,7 +9133,7 @@
             </a:r>
             <a:r>
               <a:rPr lang="en-US" dirty="0"/>
-              <a:t>: number of attention heads (e.g., 4–8) – trade‑off between diversity and computation.</a:t>
+              <a:t>: number of attention heads (e.g., 4–8) – trade‑off between diversity and computation</a:t>
             </a:r>
           </a:p>
           <a:p>
@@ -7165,7 +9146,7 @@
             </a:r>
             <a:r>
               <a:rPr lang="en-US" dirty="0"/>
-              <a:t>: number of encoder blocks – deeper networks capture more complex patterns.</a:t>
+              <a:t>: number of encoder blocks – deeper networks capture more complex patterns</a:t>
             </a:r>
           </a:p>
           <a:p>
@@ -7178,7 +9159,7 @@
             </a:r>
             <a:r>
               <a:rPr lang="en-US" dirty="0"/>
-              <a:t>: number of outputs variables (i.e. number of steps ahead).</a:t>
+              <a:t>: number of outputs variables (i.e. number of steps ahead)</a:t>
             </a:r>
           </a:p>
           <a:p>
@@ -7319,13 +9300,13 @@
           <a:p>
             <a:r>
               <a:rPr lang="en-US" dirty="0"/>
-              <a:t>Transformers offer parallelism and long‑range modelling at the cost of quadratic complexity.</a:t>
+              <a:t>Transformers offer parallelism and long‑range modelling at the cost of quadratic complexity</a:t>
             </a:r>
           </a:p>
           <a:p>
             <a:r>
               <a:rPr lang="en-US" dirty="0"/>
-              <a:t>LSTMs remain useful when sequence lengths are moderate and resources limited.</a:t>
+              <a:t>LSTMs remain useful when sequence lengths are moderate and resources limited</a:t>
             </a:r>
           </a:p>
         </p:txBody>
@@ -8629,31 +10610,31 @@
           <a:p>
             <a:r>
               <a:rPr lang="en-IE" dirty="0"/>
-              <a:t>Use, for example, before full model fitting to obtain better values of embeddings or other aspects of the model.</a:t>
+              <a:t>Use, for example, before full model fitting to obtain better values of embeddings or other aspects of the model</a:t>
             </a:r>
           </a:p>
           <a:p>
             <a:r>
               <a:rPr lang="en-IE" dirty="0"/>
-              <a:t>Take a large data set and try to learn something simple from it before you run it on your specific task.</a:t>
+              <a:t>Take a large data set and try to learn something simple from it before you run it on your specific task</a:t>
             </a:r>
           </a:p>
           <a:p>
             <a:r>
               <a:rPr lang="en-IE" dirty="0"/>
-              <a:t>E.g. predict next item in a sequence, mask out some part of the values and predict them.</a:t>
+              <a:t>E.g. predict next item in a sequence, mask out some part of the values and predict them</a:t>
             </a:r>
           </a:p>
           <a:p>
             <a:r>
               <a:rPr lang="en-IE" dirty="0"/>
-              <a:t>Makes the later fitting of the model much easier.</a:t>
+              <a:t>Makes the later fitting of the model much easier</a:t>
             </a:r>
           </a:p>
           <a:p>
             <a:r>
               <a:rPr lang="en-IE" dirty="0"/>
-              <a:t>Does add computational cost and sometimes worsens bias on training data.</a:t>
+              <a:t>Does add computational cost and sometimes worsens bias on training data</a:t>
             </a:r>
           </a:p>
         </p:txBody>
@@ -8778,7 +10759,7 @@
             </a:r>
             <a:r>
               <a:rPr lang="en-US" dirty="0"/>
-              <a:t>: design sparse attention patterns to handle long sequences efficiently.</a:t>
+              <a:t>: design sparse attention patterns to handle long sequences efficiently</a:t>
             </a:r>
           </a:p>
           <a:p>
@@ -8792,13 +10773,13 @@
             </a:r>
             <a:r>
               <a:rPr lang="en-US" dirty="0"/>
-              <a:t>: reduce memory with low‑rank projections.</a:t>
+              <a:t>: reduce memory with low‑rank projections</a:t>
             </a:r>
           </a:p>
           <a:p>
             <a:r>
               <a:rPr lang="en-US" dirty="0"/>
-              <a:t>BERT, GPT: pre‑trained language models; can be adapted to forecasting via fine‑tuning.</a:t>
+              <a:t>BERT, GPT: pre‑trained language models; can be adapted to forecasting via fine‑tuning</a:t>
             </a:r>
           </a:p>
           <a:p>
@@ -8810,10 +10791,7 @@
               <a:rPr lang="en-US" dirty="0" err="1"/>
               <a:t>seasonalities</a:t>
             </a:r>
-            <a:r>
-              <a:rPr lang="en-US" dirty="0"/>
-              <a:t>.</a:t>
-            </a:r>
+            <a:endParaRPr lang="en-US" dirty="0"/>
           </a:p>
         </p:txBody>
       </p:sp>
@@ -8935,13 +10913,13 @@
                 </a:r>
                 <a:r>
                   <a:rPr lang="en-US" dirty="0"/>
-                  <a:t> inputs and consider detrending/seasonal decomposition.</a:t>
+                  <a:t> inputs and consider detrending/seasonal decomposition</a:t>
                 </a:r>
               </a:p>
               <a:p>
                 <a:r>
                   <a:rPr lang="en-US" dirty="0"/>
-                  <a:t>Choose a window size that captures sufficient context without too much overhead.</a:t>
+                  <a:t>Choose a window size that captures sufficient context without too much overhead</a:t>
                 </a:r>
               </a:p>
               <a:p>
@@ -8955,13 +10933,13 @@
                 </a:r>
                 <a:r>
                   <a:rPr lang="en-US" dirty="0"/>
-                  <a:t>; small values may suffice for time series.</a:t>
+                  <a:t>; small values may suffice for time series</a:t>
                 </a:r>
               </a:p>
               <a:p>
                 <a:r>
                   <a:rPr lang="en-US" dirty="0"/>
-                  <a:t>Monitor validation loss and apply early stopping or learning‑rate schedules.</a:t>
+                  <a:t>Monitor validation loss and apply early stopping or learning‑rate schedules</a:t>
                 </a:r>
               </a:p>
               <a:p>
@@ -8985,10 +10963,7 @@
                     </m:r>
                   </m:oMath>
                 </a14:m>
-                <a:r>
-                  <a:rPr lang="en-US" dirty="0"/>
-                  <a:t>.</a:t>
-                </a:r>
+                <a:endParaRPr lang="en-US" dirty="0"/>
               </a:p>
             </p:txBody>
           </p:sp>
@@ -9012,7 +10987,7 @@
             </p:nvSpPr>
             <p:spPr>
               <a:blipFill>
-                <a:blip r:embed="rId2"/>
+                <a:blip r:embed="rId3"/>
                 <a:stretch>
                   <a:fillRect l="-1216" t="-2744"/>
                 </a:stretch>
@@ -9182,7 +11157,7 @@
           <p:nvPr/>
         </p:nvPicPr>
         <p:blipFill>
-          <a:blip r:embed="rId2"/>
+          <a:blip r:embed="rId3"/>
           <a:stretch>
             <a:fillRect/>
           </a:stretch>
@@ -9486,7 +11461,7 @@
             </a:r>
             <a:r>
               <a:rPr lang="en-US" dirty="0"/>
-              <a:t> and capturing long‑range dependencies.</a:t>
+              <a:t> and capturing long‑range dependencies</a:t>
             </a:r>
           </a:p>
           <a:p>
@@ -9496,7 +11471,7 @@
             </a:pPr>
             <a:r>
               <a:rPr lang="en-US" dirty="0"/>
-              <a:t>Scaled dot‑product and multi‑head attention are core building blocks.</a:t>
+              <a:t>Scaled dot‑product and multi‑head attention are core building blocks</a:t>
             </a:r>
           </a:p>
           <a:p>
@@ -9506,7 +11481,7 @@
             </a:pPr>
             <a:r>
               <a:rPr lang="en-US" dirty="0"/>
-              <a:t>Positional encoding injects order information into the model.</a:t>
+              <a:t>Positional encoding injects order information into the model</a:t>
             </a:r>
           </a:p>
           <a:p>
@@ -9516,7 +11491,7 @@
             </a:pPr>
             <a:r>
               <a:rPr lang="en-US" dirty="0"/>
-              <a:t>On weather forecasting, transformers handle multivariate sequences effectively when sequence length is moderate.</a:t>
+              <a:t>On weather forecasting, transformers handle multivariate sequences effectively when sequence length is moderate</a:t>
             </a:r>
           </a:p>
           <a:p>
@@ -9525,12 +11500,15 @@
               <a:buChar char="•"/>
             </a:pPr>
             <a:r>
-              <a:rPr lang="en-US" dirty="0" err="1"/>
+              <a:rPr lang="en-US" dirty="0" err="1">
+                <a:latin typeface="Courier New" panose="02070309020205020404" pitchFamily="49" charset="0"/>
+                <a:cs typeface="Courier New" panose="02070309020205020404" pitchFamily="49" charset="0"/>
+              </a:rPr>
               <a:t>PyTorch</a:t>
             </a:r>
             <a:r>
               <a:rPr lang="en-US" dirty="0"/>
-              <a:t> makes fitting these kinds of models relatively easy.</a:t>
+              <a:t> makes fitting these kinds of models relatively easy</a:t>
             </a:r>
           </a:p>
         </p:txBody>
@@ -9570,6 +11548,145 @@
           <p:cNvPr id="2" name="Title 1">
             <a:extLst>
               <a:ext uri="{FF2B5EF4-FFF2-40B4-BE49-F238E27FC236}">
+                <a16:creationId xmlns:a16="http://schemas.microsoft.com/office/drawing/2014/main" id="{270A834B-E6A7-DB6A-B3F4-E4FB6954DB6A}"/>
+              </a:ext>
+            </a:extLst>
+          </p:cNvPr>
+          <p:cNvSpPr>
+            <a:spLocks noGrp="1"/>
+          </p:cNvSpPr>
+          <p:nvPr>
+            <p:ph type="ctrTitle"/>
+          </p:nvPr>
+        </p:nvSpPr>
+        <p:spPr/>
+        <p:txBody>
+          <a:bodyPr/>
+          <a:lstStyle/>
+          <a:p>
+            <a:endParaRPr lang="en-US"/>
+          </a:p>
+        </p:txBody>
+      </p:sp>
+      <p:sp>
+        <p:nvSpPr>
+          <p:cNvPr id="3" name="Subtitle 2">
+            <a:extLst>
+              <a:ext uri="{FF2B5EF4-FFF2-40B4-BE49-F238E27FC236}">
+                <a16:creationId xmlns:a16="http://schemas.microsoft.com/office/drawing/2014/main" id="{F84ECABE-8F06-9E2C-1363-0B2628602B42}"/>
+              </a:ext>
+            </a:extLst>
+          </p:cNvPr>
+          <p:cNvSpPr>
+            <a:spLocks noGrp="1"/>
+          </p:cNvSpPr>
+          <p:nvPr>
+            <p:ph type="subTitle" idx="1"/>
+          </p:nvPr>
+        </p:nvSpPr>
+        <p:spPr/>
+        <p:txBody>
+          <a:bodyPr/>
+          <a:lstStyle/>
+          <a:p>
+            <a:endParaRPr lang="en-US"/>
+          </a:p>
+        </p:txBody>
+      </p:sp>
+      <p:sp>
+        <p:nvSpPr>
+          <p:cNvPr id="4" name="Slide Number Placeholder 3">
+            <a:extLst>
+              <a:ext uri="{FF2B5EF4-FFF2-40B4-BE49-F238E27FC236}">
+                <a16:creationId xmlns:a16="http://schemas.microsoft.com/office/drawing/2014/main" id="{8D8A7435-36C2-6D40-A56F-2FAFF72F7E4D}"/>
+              </a:ext>
+            </a:extLst>
+          </p:cNvPr>
+          <p:cNvSpPr>
+            <a:spLocks noGrp="1"/>
+          </p:cNvSpPr>
+          <p:nvPr>
+            <p:ph type="sldNum" sz="quarter" idx="11"/>
+          </p:nvPr>
+        </p:nvSpPr>
+        <p:spPr/>
+        <p:txBody>
+          <a:bodyPr/>
+          <a:lstStyle/>
+          <a:p>
+            <a:fld id="{5A064C77-022D-3743-A04E-645624933D1D}" type="slidenum">
+              <a:rPr lang="en-US" smtClean="0"/>
+              <a:t>21</a:t>
+            </a:fld>
+            <a:endParaRPr lang="en-US"/>
+          </a:p>
+        </p:txBody>
+      </p:sp>
+      <p:pic>
+        <p:nvPicPr>
+          <p:cNvPr id="6" name="slide.url=https://www.polleverywhere.com/multiple_choice_polls/21taUBEO7nRKhZ37Z5yHt?state=opened&amp;flow=Default&amp;onscreen=persist">
+            <a:extLst>
+              <a:ext uri="{FF2B5EF4-FFF2-40B4-BE49-F238E27FC236}">
+                <a16:creationId xmlns:a16="http://schemas.microsoft.com/office/drawing/2014/main" id="{AA44FA65-196E-2544-547F-A50A7E68E6D3}"/>
+              </a:ext>
+            </a:extLst>
+          </p:cNvPr>
+          <p:cNvPicPr>
+            <a:picLocks/>
+          </p:cNvPicPr>
+          <p:nvPr/>
+        </p:nvPicPr>
+        <p:blipFill>
+          <a:blip r:embed="rId3"/>
+          <a:stretch>
+            <a:fillRect/>
+          </a:stretch>
+        </p:blipFill>
+        <p:spPr>
+          <a:xfrm>
+            <a:off x="63500" y="63500"/>
+            <a:ext cx="12065000" cy="6731000"/>
+          </a:xfrm>
+          <a:prstGeom prst="rect">
+            <a:avLst/>
+          </a:prstGeom>
+        </p:spPr>
+      </p:pic>
+    </p:spTree>
+    <p:extLst>
+      <p:ext uri="{BB962C8B-B14F-4D97-AF65-F5344CB8AC3E}">
+        <p14:creationId xmlns:p14="http://schemas.microsoft.com/office/powerpoint/2010/main" val="3413603578"/>
+      </p:ext>
+    </p:extLst>
+  </p:cSld>
+  <p:clrMapOvr>
+    <a:masterClrMapping/>
+  </p:clrMapOvr>
+</p:sld>
+</file>
+
+<file path=ppt/slides/slide22.xml><?xml version="1.0" encoding="utf-8"?>
+<p:sld xmlns:a="http://schemas.openxmlformats.org/drawingml/2006/main" xmlns:r="http://schemas.openxmlformats.org/officeDocument/2006/relationships" xmlns:p="http://schemas.openxmlformats.org/presentationml/2006/main">
+  <p:cSld>
+    <p:spTree>
+      <p:nvGrpSpPr>
+        <p:cNvPr id="1" name=""/>
+        <p:cNvGrpSpPr/>
+        <p:nvPr/>
+      </p:nvGrpSpPr>
+      <p:grpSpPr>
+        <a:xfrm>
+          <a:off x="0" y="0"/>
+          <a:ext cx="0" cy="0"/>
+          <a:chOff x="0" y="0"/>
+          <a:chExt cx="0" cy="0"/>
+        </a:xfrm>
+      </p:grpSpPr>
+      <p:sp>
+        <p:nvSpPr>
+          <p:cNvPr id="2" name="Title 1">
+            <a:extLst>
+              <a:ext uri="{FF2B5EF4-FFF2-40B4-BE49-F238E27FC236}">
                 <a16:creationId xmlns:a16="http://schemas.microsoft.com/office/drawing/2014/main" id="{5272E10E-525F-42F7-F943-C6C1FF1B7CC1}"/>
               </a:ext>
             </a:extLst>
@@ -9641,7 +11758,7 @@
 </p:sld>
 </file>
 
-<file path=ppt/slides/slide22.xml><?xml version="1.0" encoding="utf-8"?>
+<file path=ppt/slides/slide23.xml><?xml version="1.0" encoding="utf-8"?>
 <p:sld xmlns:a="http://schemas.openxmlformats.org/drawingml/2006/main" xmlns:r="http://schemas.openxmlformats.org/officeDocument/2006/relationships" xmlns:p="http://schemas.openxmlformats.org/presentationml/2006/main">
   <p:cSld>
     <p:spTree>
@@ -9716,7 +11833,7 @@
         </p:spPr>
         <p:txBody>
           <a:bodyPr>
-            <a:normAutofit fontScale="92500" lnSpcReduction="20000"/>
+            <a:normAutofit/>
           </a:bodyPr>
           <a:lstStyle/>
           <a:p>
@@ -9778,21 +11895,6 @@
           </a:p>
           <a:p>
             <a:endParaRPr lang="en-US" b="1" dirty="0">
-              <a:solidFill>
-                <a:srgbClr val="FF0000"/>
-              </a:solidFill>
-            </a:endParaRPr>
-          </a:p>
-          <a:p>
-            <a:r>
-              <a:rPr lang="en-US" b="1" dirty="0">
-                <a:solidFill>
-                  <a:srgbClr val="FF0000"/>
-                </a:solidFill>
-              </a:rPr>
-              <a:t>Presentations: Quinn School of Business Room 115 at 3pm</a:t>
-            </a:r>
-            <a:endParaRPr lang="en-US" dirty="0">
               <a:solidFill>
                 <a:srgbClr val="FF0000"/>
               </a:solidFill>
@@ -9890,7 +11992,7 @@
           <a:p>
             <a:r>
               <a:rPr lang="en-US" dirty="0"/>
-              <a:t>RNNs &amp; LSTMs model sequences sequentially; hidden state passes information across time.</a:t>
+              <a:t>RNNs &amp; LSTMs model sequences sequentially; hidden state passes information across time</a:t>
             </a:r>
           </a:p>
           <a:p>
@@ -9902,21 +12004,18 @@
               <a:rPr lang="en-US" dirty="0" err="1"/>
               <a:t>parallelise</a:t>
             </a:r>
+            <a:endParaRPr lang="en-US" dirty="0"/>
+          </a:p>
+          <a:p>
             <a:r>
               <a:rPr lang="en-US" dirty="0"/>
-              <a:t>.</a:t>
+              <a:t>Long‑range dependencies cause gradients to vanish or explode</a:t>
             </a:r>
           </a:p>
           <a:p>
             <a:r>
               <a:rPr lang="en-US" dirty="0"/>
-              <a:t>Long‑range dependencies cause gradients to vanish or explode.</a:t>
-            </a:r>
-          </a:p>
-          <a:p>
-            <a:r>
-              <a:rPr lang="en-US" dirty="0"/>
-              <a:t>Transformers rely solely on attention and enable parallel computation across positions.</a:t>
+              <a:t>Transformers rely solely on attention and enable parallel computation across positions</a:t>
             </a:r>
           </a:p>
         </p:txBody>
@@ -10836,7 +12935,7 @@
           <a:p>
             <a:r>
               <a:rPr lang="en-US" dirty="0"/>
-              <a:t>We have a bunch of neural networks, created via queries (Q), keys (K) and values (V).</a:t>
+              <a:t>We have a bunch of neural networks, created via queries (Q), keys (K) and values (V)</a:t>
             </a:r>
           </a:p>
           <a:p>
@@ -10850,7 +12949,7 @@
             </a:r>
             <a:r>
               <a:rPr lang="en-US" dirty="0"/>
-              <a:t> the original input values of our sequence into a latent space which captures the meaning and relationships between the values.</a:t>
+              <a:t> the original input values of our sequence into a latent space which captures the meaning and relationships between the values</a:t>
             </a:r>
           </a:p>
           <a:p>
@@ -10864,13 +12963,13 @@
             </a:r>
             <a:r>
               <a:rPr lang="en-US" dirty="0"/>
-              <a:t>that tell us how much influence the input sequence has on itself.</a:t>
+              <a:t>that tell us how much influence the input sequence has on itself</a:t>
             </a:r>
           </a:p>
           <a:p>
             <a:r>
               <a:rPr lang="en-US" dirty="0"/>
-              <a:t>We can do this also for the output sequence, and for the link between the inputs and the output sequence. </a:t>
+              <a:t>We can do this also for the output sequence, and for the link between the inputs and the output sequence</a:t>
             </a:r>
           </a:p>
           <a:p>
@@ -11136,7 +13235,7 @@
               <a:p>
                 <a:r>
                   <a:rPr lang="en-US" dirty="0"/>
-                  <a:t>Compute dot products between each query and all keys.</a:t>
+                  <a:t>Compute dot products between each query and all keys</a:t>
                 </a:r>
               </a:p>
               <a:p>
@@ -11177,7 +13276,7 @@
                 </a:r>
                 <a:r>
                   <a:rPr lang="en-US" dirty="0"/>
-                  <a:t> gradients.</a:t>
+                  <a:t> gradients</a:t>
                 </a:r>
               </a:p>
               <a:p>
@@ -11191,13 +13290,13 @@
                 </a:r>
                 <a:r>
                   <a:rPr lang="en-US" dirty="0"/>
-                  <a:t> to obtain weights across all positions.</a:t>
+                  <a:t> to obtain weights across all positions</a:t>
                 </a:r>
               </a:p>
               <a:p>
                 <a:r>
                   <a:rPr lang="en-US" dirty="0"/>
-                  <a:t>Multiply the weights with values and sum them to get the output.</a:t>
+                  <a:t>Multiply the weights with values and sum them to get the output</a:t>
                 </a:r>
               </a:p>
             </p:txBody>
@@ -11222,7 +13321,7 @@
             </p:nvSpPr>
             <p:spPr>
               <a:blipFill>
-                <a:blip r:embed="rId2"/>
+                <a:blip r:embed="rId3"/>
                 <a:stretch>
                   <a:fillRect l="-1368" r="-1368"/>
                 </a:stretch>
@@ -11523,7 +13622,7 @@
             </p:nvSpPr>
             <p:spPr>
               <a:blipFill>
-                <a:blip r:embed="rId2"/>
+                <a:blip r:embed="rId3"/>
                 <a:stretch>
                   <a:fillRect l="-1520" t="-2744"/>
                 </a:stretch>
@@ -11692,6 +13791,39 @@
           </a:p>
         </p:txBody>
       </p:sp>
+      <p:pic>
+        <p:nvPicPr>
+          <p:cNvPr id="5" name="Picture 4">
+            <a:extLst>
+              <a:ext uri="{FF2B5EF4-FFF2-40B4-BE49-F238E27FC236}">
+                <a16:creationId xmlns:a16="http://schemas.microsoft.com/office/drawing/2014/main" id="{DA6D3252-D3ED-7447-F513-3FE69405C9C2}"/>
+              </a:ext>
+            </a:extLst>
+          </p:cNvPr>
+          <p:cNvPicPr>
+            <a:picLocks noChangeAspect="1"/>
+          </p:cNvPicPr>
+          <p:nvPr/>
+        </p:nvPicPr>
+        <p:blipFill>
+          <a:blip r:embed="rId3"/>
+          <a:stretch>
+            <a:fillRect/>
+          </a:stretch>
+        </p:blipFill>
+        <p:spPr>
+          <a:xfrm>
+            <a:off x="6210019" y="883085"/>
+            <a:ext cx="3746874" cy="4989386"/>
+          </a:xfrm>
+          <a:prstGeom prst="rect">
+            <a:avLst/>
+          </a:prstGeom>
+          <a:solidFill>
+            <a:schemeClr val="bg1"/>
+          </a:solidFill>
+        </p:spPr>
+      </p:pic>
     </p:spTree>
     <p:extLst>
       <p:ext uri="{BB962C8B-B14F-4D97-AF65-F5344CB8AC3E}">
@@ -11775,7 +13907,7 @@
           <a:p>
             <a:r>
               <a:rPr lang="en-US" dirty="0"/>
-              <a:t>We have simplified everything. </a:t>
+              <a:t>We have simplified everything</a:t>
             </a:r>
           </a:p>
           <a:p>
@@ -11788,28 +13920,28 @@
             <a:pPr lvl="1"/>
             <a:r>
               <a:rPr lang="en-US" dirty="0"/>
-              <a:t>Used more latent dimensions (and potentially changed them through the keys).</a:t>
+              <a:t>Used more latent dimensions (and potentially changed them through the keys)</a:t>
             </a:r>
           </a:p>
           <a:p>
             <a:pPr lvl="1"/>
             <a:r>
               <a:rPr lang="en-US" dirty="0"/>
-              <a:t>Replaced the creation of queries keys and values with full NNs.</a:t>
+              <a:t>Replaced the creation of queries keys and values with full NNs</a:t>
             </a:r>
           </a:p>
           <a:p>
             <a:pPr lvl="1"/>
             <a:r>
               <a:rPr lang="en-US" dirty="0"/>
-              <a:t>Performed independent attentions to create a multi-head attention blocks.</a:t>
+              <a:t>Performed independent attentions to create a multi-head attention blocks</a:t>
             </a:r>
           </a:p>
           <a:p>
             <a:pPr lvl="1"/>
             <a:r>
               <a:rPr lang="en-US" dirty="0"/>
-              <a:t>Added in a decoder. </a:t>
+              <a:t>Added in a decoder</a:t>
             </a:r>
           </a:p>
         </p:txBody>
@@ -11956,15 +14088,12 @@
                     </m:r>
                   </m:oMath>
                 </a14:m>
-                <a:r>
-                  <a:rPr lang="en-US" dirty="0"/>
-                  <a:t>.</a:t>
-                </a:r>
+                <a:endParaRPr lang="en-US" dirty="0"/>
               </a:p>
               <a:p>
                 <a:r>
                   <a:rPr lang="en-US" dirty="0"/>
-                  <a:t>We re-use all the weights behind the transformer components.</a:t>
+                  <a:t>We re-use all the weights behind the transformer components</a:t>
                 </a:r>
               </a:p>
               <a:p>
@@ -11976,7 +14105,7 @@
               <a:p>
                 <a:r>
                   <a:rPr lang="en-US" dirty="0"/>
-                  <a:t>Massively reduces the number of parameters needed to estimate.</a:t>
+                  <a:t>Massively reduces the number of parameters needed to estimate</a:t>
                 </a:r>
               </a:p>
               <a:p>
@@ -12004,7 +14133,7 @@
             </p:nvSpPr>
             <p:spPr>
               <a:blipFill>
-                <a:blip r:embed="rId2"/>
+                <a:blip r:embed="rId3"/>
                 <a:stretch>
                   <a:fillRect l="-1368" t="-2439"/>
                 </a:stretch>

--- a/slides/day 3/D3C2_Transformers.pptx
+++ b/slides/day 3/D3C2_Transformers.pptx
@@ -1197,7 +1197,7 @@
           <a:p>
             <a:fld id="{FF5685EE-3D40-0A4E-BB88-46887330FC0A}" type="datetimeFigureOut">
               <a:rPr lang="en-US" smtClean="0"/>
-              <a:t>2/18/26</a:t>
+              <a:t>2/26/26</a:t>
             </a:fld>
             <a:endParaRPr lang="en-US"/>
           </a:p>
@@ -10882,8 +10882,8 @@
           </a:p>
         </p:txBody>
       </p:sp>
-      <mc:AlternateContent xmlns:mc="http://schemas.openxmlformats.org/markup-compatibility/2006" xmlns:a14="http://schemas.microsoft.com/office/drawing/2010/main">
-        <mc:Choice Requires="a14">
+      <mc:AlternateContent xmlns:mc="http://schemas.openxmlformats.org/markup-compatibility/2006">
+        <mc:Choice xmlns:a14="http://schemas.microsoft.com/office/drawing/2010/main" Requires="a14">
           <p:sp>
             <p:nvSpPr>
               <p:cNvPr id="3" name="Content Placeholder 2">
@@ -10927,10 +10927,16 @@
                   <a:rPr lang="en-US" dirty="0"/>
                   <a:t>Experiment with number of heads and </a:t>
                 </a:r>
-                <a:r>
-                  <a:rPr lang="en-US" dirty="0" err="1"/>
-                  <a:t>d_model</a:t>
-                </a:r>
+                <a14:m>
+                  <m:oMath xmlns:m="http://schemas.openxmlformats.org/officeDocument/2006/math">
+                    <m:r>
+                      <a:rPr lang="en-US" i="1" dirty="0" smtClean="0">
+                        <a:latin typeface="Cambria Math" panose="02040503050406030204" pitchFamily="18" charset="0"/>
+                      </a:rPr>
+                      <m:t>𝑑</m:t>
+                    </m:r>
+                  </m:oMath>
+                </a14:m>
                 <a:r>
                   <a:rPr lang="en-US" dirty="0"/>
                   <a:t>; small values may suffice for time series</a:t>
@@ -10968,7 +10974,7 @@
             </p:txBody>
           </p:sp>
         </mc:Choice>
-        <mc:Fallback xmlns="">
+        <mc:Fallback>
           <p:sp>
             <p:nvSpPr>
               <p:cNvPr id="3" name="Content Placeholder 2">
@@ -10989,7 +10995,7 @@
               <a:blipFill>
                 <a:blip r:embed="rId3"/>
                 <a:stretch>
-                  <a:fillRect l="-1216" t="-2744"/>
+                  <a:fillRect l="-1216" t="-2744" r="-1216"/>
                 </a:stretch>
               </a:blipFill>
             </p:spPr>

--- a/slides/day 3/D3C2_Transformers.pptx
+++ b/slides/day 3/D3C2_Transformers.pptx
@@ -1197,7 +1197,7 @@
           <a:p>
             <a:fld id="{FF5685EE-3D40-0A4E-BB88-46887330FC0A}" type="datetimeFigureOut">
               <a:rPr lang="en-US" smtClean="0"/>
-              <a:t>2/26/26</a:t>
+              <a:t>2/28/26</a:t>
             </a:fld>
             <a:endParaRPr lang="en-US"/>
           </a:p>
@@ -10882,8 +10882,8 @@
           </a:p>
         </p:txBody>
       </p:sp>
-      <mc:AlternateContent xmlns:mc="http://schemas.openxmlformats.org/markup-compatibility/2006">
-        <mc:Choice xmlns:a14="http://schemas.microsoft.com/office/drawing/2010/main" Requires="a14">
+      <mc:AlternateContent xmlns:mc="http://schemas.openxmlformats.org/markup-compatibility/2006" xmlns:a14="http://schemas.microsoft.com/office/drawing/2010/main">
+        <mc:Choice Requires="a14">
           <p:sp>
             <p:nvSpPr>
               <p:cNvPr id="3" name="Content Placeholder 2">
@@ -10974,7 +10974,7 @@
             </p:txBody>
           </p:sp>
         </mc:Choice>
-        <mc:Fallback>
+        <mc:Fallback xmlns="">
           <p:sp>
             <p:nvSpPr>
               <p:cNvPr id="3" name="Content Placeholder 2">
@@ -11711,7 +11711,7 @@
           <a:p>
             <a:r>
               <a:rPr lang="en-US" dirty="0"/>
-              <a:t>Next class</a:t>
+              <a:t>Relevant code</a:t>
             </a:r>
           </a:p>
         </p:txBody>
@@ -11737,10 +11737,6 @@
           <a:bodyPr/>
           <a:lstStyle/>
           <a:p>
-            <a:r>
-              <a:rPr lang="en-US" dirty="0"/>
-              <a:t>Run through </a:t>
-            </a:r>
             <a:r>
               <a:rPr lang="en-US" dirty="0">
                 <a:latin typeface="Courier New" panose="02070309020205020404" pitchFamily="49" charset="0"/>
